--- a/report & slides/Cloud Presentation.pptx
+++ b/report & slides/Cloud Presentation.pptx
@@ -5,10 +5,10 @@
     <p:sldMasterId id="2147483672" r:id="rId1"/>
   </p:sldMasterIdLst>
   <p:notesMasterIdLst>
-    <p:notesMasterId r:id="rId17"/>
+    <p:notesMasterId r:id="rId15"/>
   </p:notesMasterIdLst>
   <p:handoutMasterIdLst>
-    <p:handoutMasterId r:id="rId18"/>
+    <p:handoutMasterId r:id="rId16"/>
   </p:handoutMasterIdLst>
   <p:sldIdLst>
     <p:sldId id="256" r:id="rId2"/>
@@ -16,16 +16,14 @@
     <p:sldId id="267" r:id="rId4"/>
     <p:sldId id="264" r:id="rId5"/>
     <p:sldId id="265" r:id="rId6"/>
-    <p:sldId id="266" r:id="rId7"/>
-    <p:sldId id="274" r:id="rId8"/>
-    <p:sldId id="273" r:id="rId9"/>
-    <p:sldId id="272" r:id="rId10"/>
-    <p:sldId id="259" r:id="rId11"/>
-    <p:sldId id="275" r:id="rId12"/>
-    <p:sldId id="276" r:id="rId13"/>
-    <p:sldId id="277" r:id="rId14"/>
-    <p:sldId id="260" r:id="rId15"/>
-    <p:sldId id="261" r:id="rId16"/>
+    <p:sldId id="274" r:id="rId7"/>
+    <p:sldId id="273" r:id="rId8"/>
+    <p:sldId id="272" r:id="rId9"/>
+    <p:sldId id="259" r:id="rId10"/>
+    <p:sldId id="275" r:id="rId11"/>
+    <p:sldId id="276" r:id="rId12"/>
+    <p:sldId id="277" r:id="rId13"/>
+    <p:sldId id="260" r:id="rId14"/>
   </p:sldIdLst>
   <p:sldSz cx="12192000" cy="6858000"/>
   <p:notesSz cx="6858000" cy="9144000"/>
@@ -3599,12 +3597,8 @@
             </a:lnSpc>
           </a:pPr>
           <a:r>
-            <a:rPr lang="en-US" noProof="0" dirty="0">
-              <a:solidFill>
-                <a:srgbClr val="FF0000"/>
-              </a:solidFill>
-            </a:rPr>
-            <a:t>Authentication is critical for WebDAV operations</a:t>
+            <a:rPr lang="en-US" noProof="0" dirty="0"/>
+            <a:t>Performance is consistent for any small number of users</a:t>
           </a:r>
           <a:endParaRPr lang="en-AE" dirty="0">
             <a:solidFill>
@@ -4629,7 +4623,7 @@
         </a:fontRef>
       </dsp:style>
       <dsp:txBody>
-        <a:bodyPr spcFirstLastPara="0" vert="horz" wrap="square" lIns="435194" tIns="45720" rIns="45720" bIns="45720" numCol="1" spcCol="1270" rtlCol="0" anchor="ctr" anchorCtr="0">
+        <a:bodyPr spcFirstLastPara="0" vert="horz" wrap="square" lIns="435194" tIns="45720" rIns="45720" bIns="45720" numCol="1" spcCol="1270" anchor="ctr" anchorCtr="0">
           <a:noAutofit/>
         </a:bodyPr>
         <a:lstStyle/>
@@ -5438,12 +5432,8 @@
             <a:buNone/>
           </a:pPr>
           <a:r>
-            <a:rPr lang="en-US" sz="2000" kern="1200" noProof="0" dirty="0">
-              <a:solidFill>
-                <a:srgbClr val="FF0000"/>
-              </a:solidFill>
-            </a:rPr>
-            <a:t>Authentication is critical for WebDAV operations</a:t>
+            <a:rPr lang="en-US" sz="2000" kern="1200" noProof="0" dirty="0"/>
+            <a:t>Performance is consistent for any small number of users</a:t>
           </a:r>
           <a:endParaRPr lang="en-AE" sz="2000" kern="1200" dirty="0">
             <a:solidFill>
@@ -15981,7 +15971,7 @@
             <a:pPr rtl="0"/>
             <a:fld id="{C0FA3576-2E34-44A5-91FF-3C53AC3DA648}" type="datetime1">
               <a:rPr lang="it-IT" smtClean="0"/>
-              <a:t>24/05/2026</a:t>
+              <a:t>25/05/2026</a:t>
             </a:fld>
             <a:endParaRPr lang="it-IT"/>
           </a:p>
@@ -16163,7 +16153,7 @@
             <a:fld id="{F8F21FEC-DF32-4E90-A279-29D5C0BB0773}" type="datetime1">
               <a:rPr lang="it-IT" smtClean="0"/>
               <a:pPr/>
-              <a:t>24/05/2026</a:t>
+              <a:t>25/05/2026</a:t>
             </a:fld>
             <a:endParaRPr lang="it-IT" dirty="0"/>
           </a:p>
@@ -16605,7 +16595,7 @@
             <a:pPr rtl="0"/>
             <a:fld id="{C6B3AB32-59DF-41F1-9618-EDFBF5049629}" type="slidenum">
               <a:rPr lang="it-IT" smtClean="0"/>
-              <a:t>10</a:t>
+              <a:t>9</a:t>
             </a:fld>
             <a:endParaRPr lang="it-IT"/>
           </a:p>
@@ -16722,7 +16712,7 @@
             <a:pPr rtl="0"/>
             <a:fld id="{C6B3AB32-59DF-41F1-9618-EDFBF5049629}" type="slidenum">
               <a:rPr lang="it-IT" smtClean="0"/>
-              <a:t>11</a:t>
+              <a:t>10</a:t>
             </a:fld>
             <a:endParaRPr lang="it-IT"/>
           </a:p>
@@ -16839,7 +16829,7 @@
             <a:pPr rtl="0"/>
             <a:fld id="{C6B3AB32-59DF-41F1-9618-EDFBF5049629}" type="slidenum">
               <a:rPr lang="it-IT" smtClean="0"/>
-              <a:t>12</a:t>
+              <a:t>11</a:t>
             </a:fld>
             <a:endParaRPr lang="it-IT"/>
           </a:p>
@@ -16956,7 +16946,7 @@
             <a:pPr rtl="0"/>
             <a:fld id="{C6B3AB32-59DF-41F1-9618-EDFBF5049629}" type="slidenum">
               <a:rPr lang="it-IT" smtClean="0"/>
-              <a:t>13</a:t>
+              <a:t>12</a:t>
             </a:fld>
             <a:endParaRPr lang="it-IT"/>
           </a:p>
@@ -17049,7 +17039,7 @@
             <a:pPr rtl="0"/>
             <a:fld id="{C6B3AB32-59DF-41F1-9618-EDFBF5049629}" type="slidenum">
               <a:rPr lang="it-IT" smtClean="0"/>
-              <a:t>14</a:t>
+              <a:t>13</a:t>
             </a:fld>
             <a:endParaRPr lang="it-IT"/>
           </a:p>
@@ -17059,99 +17049,6 @@
     <p:extLst>
       <p:ext uri="{BB962C8B-B14F-4D97-AF65-F5344CB8AC3E}">
         <p14:creationId xmlns:p14="http://schemas.microsoft.com/office/powerpoint/2010/main" val="1046714131"/>
-      </p:ext>
-    </p:extLst>
-  </p:cSld>
-  <p:clrMapOvr>
-    <a:masterClrMapping/>
-  </p:clrMapOvr>
-</p:notes>
-</file>
-
-<file path=ppt/notesSlides/notesSlide7.xml><?xml version="1.0" encoding="utf-8"?>
-<p:notes xmlns:a="http://schemas.openxmlformats.org/drawingml/2006/main" xmlns:r="http://schemas.openxmlformats.org/officeDocument/2006/relationships" xmlns:p="http://schemas.openxmlformats.org/presentationml/2006/main">
-  <p:cSld>
-    <p:spTree>
-      <p:nvGrpSpPr>
-        <p:cNvPr id="1" name=""/>
-        <p:cNvGrpSpPr/>
-        <p:nvPr/>
-      </p:nvGrpSpPr>
-      <p:grpSpPr>
-        <a:xfrm>
-          <a:off x="0" y="0"/>
-          <a:ext cx="0" cy="0"/>
-          <a:chOff x="0" y="0"/>
-          <a:chExt cx="0" cy="0"/>
-        </a:xfrm>
-      </p:grpSpPr>
-      <p:sp>
-        <p:nvSpPr>
-          <p:cNvPr id="2" name="Segnaposto immagine diapositiva 1"/>
-          <p:cNvSpPr>
-            <a:spLocks noGrp="1" noRot="1" noChangeAspect="1"/>
-          </p:cNvSpPr>
-          <p:nvPr>
-            <p:ph type="sldImg"/>
-          </p:nvPr>
-        </p:nvSpPr>
-        <p:spPr/>
-        <p:txBody>
-          <a:bodyPr/>
-          <a:lstStyle/>
-          <a:p>
-            <a:endParaRPr lang="en-AE"/>
-          </a:p>
-        </p:txBody>
-      </p:sp>
-      <p:sp>
-        <p:nvSpPr>
-          <p:cNvPr id="3" name="Segnaposto note 2"/>
-          <p:cNvSpPr>
-            <a:spLocks noGrp="1"/>
-          </p:cNvSpPr>
-          <p:nvPr>
-            <p:ph type="body" idx="1"/>
-          </p:nvPr>
-        </p:nvSpPr>
-        <p:spPr/>
-        <p:txBody>
-          <a:bodyPr rtlCol="0"/>
-          <a:lstStyle/>
-          <a:p>
-            <a:pPr rtl="0"/>
-            <a:endParaRPr lang="it-IT"/>
-          </a:p>
-        </p:txBody>
-      </p:sp>
-      <p:sp>
-        <p:nvSpPr>
-          <p:cNvPr id="4" name="Segnaposto numero diapositiva 3"/>
-          <p:cNvSpPr>
-            <a:spLocks noGrp="1"/>
-          </p:cNvSpPr>
-          <p:nvPr>
-            <p:ph type="sldNum" sz="quarter" idx="5"/>
-          </p:nvPr>
-        </p:nvSpPr>
-        <p:spPr/>
-        <p:txBody>
-          <a:bodyPr rtlCol="0"/>
-          <a:lstStyle/>
-          <a:p>
-            <a:pPr rtl="0"/>
-            <a:fld id="{C6B3AB32-59DF-41F1-9618-EDFBF5049629}" type="slidenum">
-              <a:rPr lang="it-IT" smtClean="0"/>
-              <a:t>15</a:t>
-            </a:fld>
-            <a:endParaRPr lang="it-IT"/>
-          </a:p>
-        </p:txBody>
-      </p:sp>
-    </p:spTree>
-    <p:extLst>
-      <p:ext uri="{BB962C8B-B14F-4D97-AF65-F5344CB8AC3E}">
-        <p14:creationId xmlns:p14="http://schemas.microsoft.com/office/powerpoint/2010/main" val="431927585"/>
       </p:ext>
     </p:extLst>
   </p:cSld>
@@ -17416,7 +17313,7 @@
             <a:pPr rtl="0"/>
             <a:fld id="{87A23933-3F77-4C59-A775-45E2435C8368}" type="datetime1">
               <a:rPr lang="it-IT" noProof="0" smtClean="0"/>
-              <a:t>24/05/2026</a:t>
+              <a:t>25/05/2026</a:t>
             </a:fld>
             <a:endParaRPr lang="it-IT" noProof="0"/>
           </a:p>
@@ -17690,7 +17587,7 @@
             <a:pPr rtl="0"/>
             <a:fld id="{4B4ECE9F-4108-4829-8F23-DFA9C926965D}" type="datetime1">
               <a:rPr lang="it-IT" noProof="0" smtClean="0"/>
-              <a:t>24/05/2026</a:t>
+              <a:t>25/05/2026</a:t>
             </a:fld>
             <a:endParaRPr lang="it-IT" noProof="0"/>
           </a:p>
@@ -17937,7 +17834,7 @@
             <a:pPr rtl="0"/>
             <a:fld id="{2AB59B6B-A2EF-4B30-AEF7-A3091D0F5449}" type="datetime1">
               <a:rPr lang="it-IT" noProof="0" smtClean="0"/>
-              <a:t>24/05/2026</a:t>
+              <a:t>25/05/2026</a:t>
             </a:fld>
             <a:endParaRPr lang="it-IT" noProof="0" dirty="0"/>
           </a:p>
@@ -18189,7 +18086,7 @@
             <a:pPr rtl="0"/>
             <a:fld id="{7F3FB14C-AC96-42E5-BE0B-73EFAA1A7EA7}" type="datetime1">
               <a:rPr lang="it-IT" noProof="0" smtClean="0"/>
-              <a:t>24/05/2026</a:t>
+              <a:t>25/05/2026</a:t>
             </a:fld>
             <a:endParaRPr lang="it-IT" noProof="0"/>
           </a:p>
@@ -18508,7 +18405,7 @@
             <a:pPr rtl="0"/>
             <a:fld id="{76327E91-20FF-43F1-A337-75953C73E7D7}" type="datetime1">
               <a:rPr lang="it-IT" noProof="0" smtClean="0"/>
-              <a:t>24/05/2026</a:t>
+              <a:t>25/05/2026</a:t>
             </a:fld>
             <a:endParaRPr lang="it-IT" noProof="0"/>
           </a:p>
@@ -18822,7 +18719,7 @@
             <a:pPr rtl="0"/>
             <a:fld id="{9EDCB701-B7F2-4988-9CFB-241C1D412354}" type="datetime1">
               <a:rPr lang="it-IT" noProof="0" smtClean="0"/>
-              <a:t>24/05/2026</a:t>
+              <a:t>25/05/2026</a:t>
             </a:fld>
             <a:endParaRPr lang="it-IT" noProof="0"/>
           </a:p>
@@ -19256,7 +19153,7 @@
             <a:pPr rtl="0"/>
             <a:fld id="{4B9B0459-76CC-4B94-A6C6-908B17D42BC8}" type="datetime1">
               <a:rPr lang="it-IT" noProof="0" smtClean="0"/>
-              <a:t>24/05/2026</a:t>
+              <a:t>25/05/2026</a:t>
             </a:fld>
             <a:endParaRPr lang="it-IT" noProof="0"/>
           </a:p>
@@ -19355,7 +19252,7 @@
             <a:pPr rtl="0"/>
             <a:fld id="{62D572E4-8572-44CF-B6FA-B15ECB2B0691}" type="datetime1">
               <a:rPr lang="it-IT" noProof="0" smtClean="0"/>
-              <a:t>24/05/2026</a:t>
+              <a:t>25/05/2026</a:t>
             </a:fld>
             <a:endParaRPr lang="it-IT" noProof="0"/>
           </a:p>
@@ -19529,7 +19426,7 @@
             <a:pPr rtl="0"/>
             <a:fld id="{5F266B29-8DDF-40ED-AC5D-ED73AC5A6521}" type="datetime1">
               <a:rPr lang="it-IT" noProof="0" smtClean="0"/>
-              <a:t>24/05/2026</a:t>
+              <a:t>25/05/2026</a:t>
             </a:fld>
             <a:endParaRPr lang="it-IT" noProof="0"/>
           </a:p>
@@ -19919,7 +19816,7 @@
             <a:pPr rtl="0"/>
             <a:fld id="{4CFC7787-2DFD-4221-B49C-354C37128239}" type="datetime1">
               <a:rPr lang="it-IT" noProof="0" smtClean="0"/>
-              <a:t>24/05/2026</a:t>
+              <a:t>25/05/2026</a:t>
             </a:fld>
             <a:endParaRPr lang="it-IT" noProof="0"/>
           </a:p>
@@ -20214,7 +20111,7 @@
             <a:pPr rtl="0"/>
             <a:fld id="{D3F07A8F-C5D3-4128-B052-E864993A59CE}" type="datetime1">
               <a:rPr lang="it-IT" noProof="0" smtClean="0"/>
-              <a:t>24/05/2026</a:t>
+              <a:t>25/05/2026</a:t>
             </a:fld>
             <a:endParaRPr lang="it-IT" noProof="0"/>
           </a:p>
@@ -20428,7 +20325,7 @@
             <a:pPr rtl="0"/>
             <a:fld id="{A36BACEF-F5E2-445B-BCCF-A68C06C41D7B}" type="datetime1">
               <a:rPr lang="it-IT" noProof="0" smtClean="0"/>
-              <a:t>24/05/2026</a:t>
+              <a:t>25/05/2026</a:t>
             </a:fld>
             <a:endParaRPr lang="it-IT" noProof="0" dirty="0"/>
           </a:p>
@@ -21557,423 +21454,6 @@
     </p:bg>
     <p:spTree>
       <p:nvGrpSpPr>
-        <p:cNvPr id="1" name=""/>
-        <p:cNvGrpSpPr/>
-        <p:nvPr/>
-      </p:nvGrpSpPr>
-      <p:grpSpPr>
-        <a:xfrm>
-          <a:off x="0" y="0"/>
-          <a:ext cx="0" cy="0"/>
-          <a:chOff x="0" y="0"/>
-          <a:chExt cx="0" cy="0"/>
-        </a:xfrm>
-      </p:grpSpPr>
-      <p:sp useBgFill="1">
-        <p:nvSpPr>
-          <p:cNvPr id="13" name="Rettangolo 12">
-            <a:extLst>
-              <a:ext uri="{FF2B5EF4-FFF2-40B4-BE49-F238E27FC236}">
-                <a16:creationId xmlns:a16="http://schemas.microsoft.com/office/drawing/2014/main" id="{4AE9D071-98CF-435C-BD2B-976514544DC5}"/>
-              </a:ext>
-              <a:ext uri="{C183D7F6-B498-43B3-948B-1728B52AA6E4}">
-                <adec:decorative xmlns:adec="http://schemas.microsoft.com/office/drawing/2017/decorative" val="1"/>
-              </a:ext>
-            </a:extLst>
-          </p:cNvPr>
-          <p:cNvSpPr>
-            <a:spLocks noChangeAspect="1"/>
-          </p:cNvSpPr>
-          <p:nvPr>
-            <p:extLst>
-              <p:ext uri="{386F3935-93C4-4BCD-93E2-E3B085C9AB24}">
-                <p16:designElem xmlns:p16="http://schemas.microsoft.com/office/powerpoint/2015/main" val="1"/>
-              </p:ext>
-            </p:extLst>
-          </p:nvPr>
-        </p:nvSpPr>
-        <p:spPr>
-          <a:xfrm>
-            <a:off x="0" y="0"/>
-            <a:ext cx="12192000" cy="6858000"/>
-          </a:xfrm>
-          <a:prstGeom prst="rect">
-            <a:avLst/>
-          </a:prstGeom>
-          <a:ln>
-            <a:noFill/>
-          </a:ln>
-        </p:spPr>
-        <p:style>
-          <a:lnRef idx="2">
-            <a:schemeClr val="accent1">
-              <a:shade val="50000"/>
-            </a:schemeClr>
-          </a:lnRef>
-          <a:fillRef idx="1">
-            <a:schemeClr val="accent1"/>
-          </a:fillRef>
-          <a:effectRef idx="0">
-            <a:schemeClr val="accent1"/>
-          </a:effectRef>
-          <a:fontRef idx="minor">
-            <a:schemeClr val="lt1"/>
-          </a:fontRef>
-        </p:style>
-        <p:txBody>
-          <a:bodyPr rtlCol="0" anchor="ctr"/>
-          <a:lstStyle/>
-          <a:p>
-            <a:pPr algn="ctr" rtl="0"/>
-            <a:endParaRPr lang="en-US" noProof="0" dirty="0"/>
-          </a:p>
-        </p:txBody>
-      </p:sp>
-      <p:pic>
-        <p:nvPicPr>
-          <p:cNvPr id="8" name="Segnaposto contenuto 4" descr="Numeri digitali">
-            <a:extLst>
-              <a:ext uri="{FF2B5EF4-FFF2-40B4-BE49-F238E27FC236}">
-                <a16:creationId xmlns:a16="http://schemas.microsoft.com/office/drawing/2014/main" id="{EA70616B-E344-4856-8DF9-707C26236613}"/>
-              </a:ext>
-            </a:extLst>
-          </p:cNvPr>
-          <p:cNvPicPr>
-            <a:picLocks noChangeAspect="1"/>
-          </p:cNvPicPr>
-          <p:nvPr/>
-        </p:nvPicPr>
-        <p:blipFill rotWithShape="1">
-          <a:blip r:embed="rId3" cstate="screen">
-            <a:extLst>
-              <a:ext uri="{28A0092B-C50C-407E-A947-70E740481C1C}">
-                <a14:useLocalDpi xmlns:a14="http://schemas.microsoft.com/office/drawing/2010/main"/>
-              </a:ext>
-            </a:extLst>
-          </a:blip>
-          <a:srcRect t="10681" r="9091" b="12711"/>
-          <a:stretch/>
-        </p:blipFill>
-        <p:spPr>
-          <a:xfrm>
-            <a:off x="20" y="10"/>
-            <a:ext cx="12191980" cy="6857990"/>
-          </a:xfrm>
-          <a:prstGeom prst="rect">
-            <a:avLst/>
-          </a:prstGeom>
-        </p:spPr>
-      </p:pic>
-      <p:grpSp>
-        <p:nvGrpSpPr>
-          <p:cNvPr id="15" name="Gruppo 14">
-            <a:extLst>
-              <a:ext uri="{FF2B5EF4-FFF2-40B4-BE49-F238E27FC236}">
-                <a16:creationId xmlns:a16="http://schemas.microsoft.com/office/drawing/2014/main" id="{D619FC33-16ED-4246-9596-BEFEB55E4CF6}"/>
-              </a:ext>
-              <a:ext uri="{C183D7F6-B498-43B3-948B-1728B52AA6E4}">
-                <adec:decorative xmlns:adec="http://schemas.microsoft.com/office/drawing/2017/decorative" val="1"/>
-              </a:ext>
-            </a:extLst>
-          </p:cNvPr>
-          <p:cNvGrpSpPr>
-            <a:grpSpLocks noChangeAspect="1"/>
-          </p:cNvGrpSpPr>
-          <p:nvPr>
-            <p:extLst>
-              <p:ext uri="{386F3935-93C4-4BCD-93E2-E3B085C9AB24}">
-                <p16:designElem xmlns:p16="http://schemas.microsoft.com/office/powerpoint/2015/main" val="1"/>
-              </p:ext>
-            </p:extLst>
-          </p:nvPr>
-        </p:nvGrpSpPr>
-        <p:grpSpPr>
-          <a:xfrm>
-            <a:off x="438067" y="457200"/>
-            <a:ext cx="7507083" cy="5935132"/>
-            <a:chOff x="438067" y="457200"/>
-            <a:chExt cx="7507083" cy="5935132"/>
-          </a:xfrm>
-        </p:grpSpPr>
-        <p:sp>
-          <p:nvSpPr>
-            <p:cNvPr id="16" name="Rettangolo 15">
-              <a:extLst>
-                <a:ext uri="{FF2B5EF4-FFF2-40B4-BE49-F238E27FC236}">
-                  <a16:creationId xmlns:a16="http://schemas.microsoft.com/office/drawing/2014/main" id="{2EEA80E1-F99F-4009-837F-2F72F8A5D580}"/>
-                </a:ext>
-                <a:ext uri="{C183D7F6-B498-43B3-948B-1728B52AA6E4}">
-                  <adec:decorative xmlns:adec="http://schemas.microsoft.com/office/drawing/2017/decorative" val="1"/>
-                </a:ext>
-              </a:extLst>
-            </p:cNvPr>
-            <p:cNvSpPr>
-              <a:spLocks/>
-            </p:cNvSpPr>
-            <p:nvPr>
-              <p:extLst>
-                <p:ext uri="{386F3935-93C4-4BCD-93E2-E3B085C9AB24}">
-                  <p16:designElem xmlns:p16="http://schemas.microsoft.com/office/powerpoint/2015/main" val="1"/>
-                </p:ext>
-              </p:extLst>
-            </p:nvPr>
-          </p:nvSpPr>
-          <p:spPr>
-            <a:xfrm>
-              <a:off x="438067" y="618067"/>
-              <a:ext cx="7503665" cy="5774265"/>
-            </a:xfrm>
-            <a:prstGeom prst="rect">
-              <a:avLst/>
-            </a:prstGeom>
-            <a:solidFill>
-              <a:schemeClr val="accent1">
-                <a:alpha val="97000"/>
-              </a:schemeClr>
-            </a:solidFill>
-            <a:ln w="6350" cmpd="sng">
-              <a:noFill/>
-            </a:ln>
-            <a:effectLst/>
-          </p:spPr>
-          <p:style>
-            <a:lnRef idx="1">
-              <a:schemeClr val="accent1"/>
-            </a:lnRef>
-            <a:fillRef idx="3">
-              <a:schemeClr val="accent1"/>
-            </a:fillRef>
-            <a:effectRef idx="2">
-              <a:schemeClr val="accent1"/>
-            </a:effectRef>
-            <a:fontRef idx="minor">
-              <a:schemeClr val="lt1"/>
-            </a:fontRef>
-          </p:style>
-          <p:txBody>
-            <a:bodyPr/>
-            <a:lstStyle/>
-            <a:p>
-              <a:endParaRPr lang="en-US" noProof="0" dirty="0"/>
-            </a:p>
-          </p:txBody>
-        </p:sp>
-        <p:sp>
-          <p:nvSpPr>
-            <p:cNvPr id="17" name="Rettangolo 16">
-              <a:extLst>
-                <a:ext uri="{FF2B5EF4-FFF2-40B4-BE49-F238E27FC236}">
-                  <a16:creationId xmlns:a16="http://schemas.microsoft.com/office/drawing/2014/main" id="{0230AF9A-4641-4BD8-9F95-9607CD304039}"/>
-                </a:ext>
-                <a:ext uri="{C183D7F6-B498-43B3-948B-1728B52AA6E4}">
-                  <adec:decorative xmlns:adec="http://schemas.microsoft.com/office/drawing/2017/decorative" val="1"/>
-                </a:ext>
-              </a:extLst>
-            </p:cNvPr>
-            <p:cNvSpPr>
-              <a:spLocks/>
-            </p:cNvSpPr>
-            <p:nvPr>
-              <p:extLst>
-                <p:ext uri="{386F3935-93C4-4BCD-93E2-E3B085C9AB24}">
-                  <p16:designElem xmlns:p16="http://schemas.microsoft.com/office/powerpoint/2015/main" val="1"/>
-                </p:ext>
-              </p:extLst>
-            </p:nvPr>
-          </p:nvSpPr>
-          <p:spPr>
-            <a:xfrm>
-              <a:off x="438068" y="457200"/>
-              <a:ext cx="3703320" cy="94997"/>
-            </a:xfrm>
-            <a:prstGeom prst="rect">
-              <a:avLst/>
-            </a:prstGeom>
-            <a:solidFill>
-              <a:schemeClr val="accent1"/>
-            </a:solidFill>
-            <a:ln>
-              <a:noFill/>
-            </a:ln>
-            <a:effectLst/>
-          </p:spPr>
-          <p:style>
-            <a:lnRef idx="1">
-              <a:schemeClr val="accent1"/>
-            </a:lnRef>
-            <a:fillRef idx="3">
-              <a:schemeClr val="accent1"/>
-            </a:fillRef>
-            <a:effectRef idx="2">
-              <a:schemeClr val="accent1"/>
-            </a:effectRef>
-            <a:fontRef idx="minor">
-              <a:schemeClr val="lt1"/>
-            </a:fontRef>
-          </p:style>
-          <p:txBody>
-            <a:bodyPr/>
-            <a:lstStyle/>
-            <a:p>
-              <a:endParaRPr lang="en-US" noProof="0" dirty="0"/>
-            </a:p>
-          </p:txBody>
-        </p:sp>
-        <p:sp>
-          <p:nvSpPr>
-            <p:cNvPr id="18" name="Rettangolo 17">
-              <a:extLst>
-                <a:ext uri="{FF2B5EF4-FFF2-40B4-BE49-F238E27FC236}">
-                  <a16:creationId xmlns:a16="http://schemas.microsoft.com/office/drawing/2014/main" id="{8703D4EC-9389-41B6-B88B-B6FDC8CD3330}"/>
-                </a:ext>
-                <a:ext uri="{C183D7F6-B498-43B3-948B-1728B52AA6E4}">
-                  <adec:decorative xmlns:adec="http://schemas.microsoft.com/office/drawing/2017/decorative" val="1"/>
-                </a:ext>
-              </a:extLst>
-            </p:cNvPr>
-            <p:cNvSpPr>
-              <a:spLocks/>
-            </p:cNvSpPr>
-            <p:nvPr>
-              <p:extLst>
-                <p:ext uri="{386F3935-93C4-4BCD-93E2-E3B085C9AB24}">
-                  <p16:designElem xmlns:p16="http://schemas.microsoft.com/office/powerpoint/2015/main" val="1"/>
-                </p:ext>
-              </p:extLst>
-            </p:nvPr>
-          </p:nvSpPr>
-          <p:spPr>
-            <a:xfrm>
-              <a:off x="4241830" y="457200"/>
-              <a:ext cx="3703320" cy="91440"/>
-            </a:xfrm>
-            <a:prstGeom prst="rect">
-              <a:avLst/>
-            </a:prstGeom>
-            <a:solidFill>
-              <a:schemeClr val="accent2"/>
-            </a:solidFill>
-            <a:ln>
-              <a:noFill/>
-            </a:ln>
-            <a:effectLst/>
-          </p:spPr>
-          <p:style>
-            <a:lnRef idx="1">
-              <a:schemeClr val="accent1"/>
-            </a:lnRef>
-            <a:fillRef idx="3">
-              <a:schemeClr val="accent1"/>
-            </a:fillRef>
-            <a:effectRef idx="2">
-              <a:schemeClr val="accent1"/>
-            </a:effectRef>
-            <a:fontRef idx="minor">
-              <a:schemeClr val="lt1"/>
-            </a:fontRef>
-          </p:style>
-          <p:txBody>
-            <a:bodyPr/>
-            <a:lstStyle/>
-            <a:p>
-              <a:endParaRPr lang="en-US" noProof="0" dirty="0"/>
-            </a:p>
-          </p:txBody>
-        </p:sp>
-      </p:grpSp>
-      <p:sp>
-        <p:nvSpPr>
-          <p:cNvPr id="2" name="Titolo 1">
-            <a:extLst>
-              <a:ext uri="{FF2B5EF4-FFF2-40B4-BE49-F238E27FC236}">
-                <a16:creationId xmlns:a16="http://schemas.microsoft.com/office/drawing/2014/main" id="{7F2616EE-270D-4F4C-BA1F-2708D387B800}"/>
-              </a:ext>
-            </a:extLst>
-          </p:cNvPr>
-          <p:cNvSpPr>
-            <a:spLocks noGrp="1"/>
-          </p:cNvSpPr>
-          <p:nvPr>
-            <p:ph type="title"/>
-          </p:nvPr>
-        </p:nvSpPr>
-        <p:spPr>
-          <a:xfrm>
-            <a:off x="584200" y="1006956"/>
-            <a:ext cx="7213600" cy="1121871"/>
-          </a:xfrm>
-        </p:spPr>
-        <p:txBody>
-          <a:bodyPr rtlCol="0" anchor="ctr">
-            <a:normAutofit/>
-          </a:bodyPr>
-          <a:lstStyle/>
-          <a:p>
-            <a:r>
-              <a:rPr lang="en-US" sz="3200" dirty="0"/>
-              <a:t> Achievements</a:t>
-            </a:r>
-            <a:endParaRPr lang="en-US" sz="3200" noProof="0" dirty="0"/>
-          </a:p>
-        </p:txBody>
-      </p:sp>
-      <p:graphicFrame>
-        <p:nvGraphicFramePr>
-          <p:cNvPr id="6" name="Segnaposto contenuto 5" descr="SmartArt">
-            <a:extLst>
-              <a:ext uri="{FF2B5EF4-FFF2-40B4-BE49-F238E27FC236}">
-                <a16:creationId xmlns:a16="http://schemas.microsoft.com/office/drawing/2014/main" id="{BF629521-FFD2-45DA-9D1D-A5F09BD5A2D9}"/>
-              </a:ext>
-            </a:extLst>
-          </p:cNvPr>
-          <p:cNvGraphicFramePr>
-            <a:graphicFrameLocks noGrp="1"/>
-          </p:cNvGraphicFramePr>
-          <p:nvPr>
-            <p:ph idx="1"/>
-            <p:extLst>
-              <p:ext uri="{D42A27DB-BD31-4B8C-83A1-F6EECF244321}">
-                <p14:modId xmlns:p14="http://schemas.microsoft.com/office/powerpoint/2010/main" val="2973809506"/>
-              </p:ext>
-            </p:extLst>
-          </p:nvPr>
-        </p:nvGraphicFramePr>
-        <p:xfrm>
-          <a:off x="719571" y="2198254"/>
-          <a:ext cx="6958486" cy="3563938"/>
-        </p:xfrm>
-        <a:graphic>
-          <a:graphicData uri="http://schemas.openxmlformats.org/drawingml/2006/diagram">
-            <dgm:relIds xmlns:dgm="http://schemas.openxmlformats.org/drawingml/2006/diagram" xmlns:r="http://schemas.openxmlformats.org/officeDocument/2006/relationships" r:dm="rId4" r:lo="rId5" r:qs="rId6" r:cs="rId7"/>
-          </a:graphicData>
-        </a:graphic>
-      </p:graphicFrame>
-    </p:spTree>
-    <p:extLst>
-      <p:ext uri="{BB962C8B-B14F-4D97-AF65-F5344CB8AC3E}">
-        <p14:creationId xmlns:p14="http://schemas.microsoft.com/office/powerpoint/2010/main" val="4209322005"/>
-      </p:ext>
-    </p:extLst>
-  </p:cSld>
-  <p:clrMapOvr>
-    <a:masterClrMapping/>
-  </p:clrMapOvr>
-</p:sld>
-</file>
-
-<file path=ppt/slides/slide11.xml><?xml version="1.0" encoding="utf-8"?>
-<p:sld xmlns:a="http://schemas.openxmlformats.org/drawingml/2006/main" xmlns:r="http://schemas.openxmlformats.org/officeDocument/2006/relationships" xmlns:p="http://schemas.openxmlformats.org/presentationml/2006/main">
-  <p:cSld>
-    <p:bg>
-      <p:bgPr>
-        <a:solidFill>
-          <a:schemeClr val="bg1"/>
-        </a:solidFill>
-        <a:effectLst/>
-      </p:bgPr>
-    </p:bg>
-    <p:spTree>
-      <p:nvGrpSpPr>
         <p:cNvPr id="1" name="">
           <a:extLst>
             <a:ext uri="{FF2B5EF4-FFF2-40B4-BE49-F238E27FC236}">
@@ -22356,7 +21836,7 @@
             <p:ph idx="1"/>
             <p:extLst>
               <p:ext uri="{D42A27DB-BD31-4B8C-83A1-F6EECF244321}">
-                <p14:modId xmlns:p14="http://schemas.microsoft.com/office/powerpoint/2010/main" val="3172491049"/>
+                <p14:modId xmlns:p14="http://schemas.microsoft.com/office/powerpoint/2010/main" val="743752688"/>
               </p:ext>
             </p:extLst>
           </p:nvPr>
@@ -22384,7 +21864,7 @@
 </p:sld>
 </file>
 
-<file path=ppt/slides/slide12.xml><?xml version="1.0" encoding="utf-8"?>
+<file path=ppt/slides/slide11.xml><?xml version="1.0" encoding="utf-8"?>
 <p:sld xmlns:a="http://schemas.openxmlformats.org/drawingml/2006/main" xmlns:r="http://schemas.openxmlformats.org/officeDocument/2006/relationships" xmlns:p="http://schemas.openxmlformats.org/presentationml/2006/main">
   <p:cSld>
     <p:bg>
@@ -22807,7 +22287,7 @@
 </p:sld>
 </file>
 
-<file path=ppt/slides/slide13.xml><?xml version="1.0" encoding="utf-8"?>
+<file path=ppt/slides/slide12.xml><?xml version="1.0" encoding="utf-8"?>
 <p:sld xmlns:a="http://schemas.openxmlformats.org/drawingml/2006/main" xmlns:r="http://schemas.openxmlformats.org/officeDocument/2006/relationships" xmlns:p="http://schemas.openxmlformats.org/presentationml/2006/main">
   <p:cSld>
     <p:bg>
@@ -23230,7 +22710,7 @@
 </p:sld>
 </file>
 
-<file path=ppt/slides/slide14.xml><?xml version="1.0" encoding="utf-8"?>
+<file path=ppt/slides/slide13.xml><?xml version="1.0" encoding="utf-8"?>
 <p:sld xmlns:a="http://schemas.openxmlformats.org/drawingml/2006/main" xmlns:r="http://schemas.openxmlformats.org/officeDocument/2006/relationships" xmlns:p="http://schemas.openxmlformats.org/presentationml/2006/main">
   <p:cSld>
     <p:bg>
@@ -23679,698 +23159,6 @@
 </p:sld>
 </file>
 
-<file path=ppt/slides/slide15.xml><?xml version="1.0" encoding="utf-8"?>
-<p:sld xmlns:a="http://schemas.openxmlformats.org/drawingml/2006/main" xmlns:r="http://schemas.openxmlformats.org/officeDocument/2006/relationships" xmlns:p="http://schemas.openxmlformats.org/presentationml/2006/main">
-  <p:cSld>
-    <p:bg>
-      <p:bgPr>
-        <a:solidFill>
-          <a:schemeClr val="bg1"/>
-        </a:solidFill>
-        <a:effectLst/>
-      </p:bgPr>
-    </p:bg>
-    <p:spTree>
-      <p:nvGrpSpPr>
-        <p:cNvPr id="1" name=""/>
-        <p:cNvGrpSpPr/>
-        <p:nvPr/>
-      </p:nvGrpSpPr>
-      <p:grpSpPr>
-        <a:xfrm>
-          <a:off x="0" y="0"/>
-          <a:ext cx="0" cy="0"/>
-          <a:chOff x="0" y="0"/>
-          <a:chExt cx="0" cy="0"/>
-        </a:xfrm>
-      </p:grpSpPr>
-      <p:sp useBgFill="1">
-        <p:nvSpPr>
-          <p:cNvPr id="29" name="Rettangolo 28">
-            <a:extLst>
-              <a:ext uri="{FF2B5EF4-FFF2-40B4-BE49-F238E27FC236}">
-                <a16:creationId xmlns:a16="http://schemas.microsoft.com/office/drawing/2014/main" id="{BFDA9692-ECDC-4B59-86B2-8C90FDE1A055}"/>
-              </a:ext>
-              <a:ext uri="{C183D7F6-B498-43B3-948B-1728B52AA6E4}">
-                <adec:decorative xmlns:adec="http://schemas.microsoft.com/office/drawing/2017/decorative" val="1"/>
-              </a:ext>
-            </a:extLst>
-          </p:cNvPr>
-          <p:cNvSpPr>
-            <a:spLocks noChangeAspect="1"/>
-          </p:cNvSpPr>
-          <p:nvPr>
-            <p:extLst>
-              <p:ext uri="{386F3935-93C4-4BCD-93E2-E3B085C9AB24}">
-                <p16:designElem xmlns:p16="http://schemas.microsoft.com/office/powerpoint/2015/main" val="1"/>
-              </p:ext>
-            </p:extLst>
-          </p:nvPr>
-        </p:nvSpPr>
-        <p:spPr>
-          <a:xfrm>
-            <a:off x="0" y="536712"/>
-            <a:ext cx="12192000" cy="6321287"/>
-          </a:xfrm>
-          <a:prstGeom prst="rect">
-            <a:avLst/>
-          </a:prstGeom>
-          <a:ln>
-            <a:noFill/>
-          </a:ln>
-        </p:spPr>
-        <p:style>
-          <a:lnRef idx="2">
-            <a:schemeClr val="accent1">
-              <a:shade val="50000"/>
-            </a:schemeClr>
-          </a:lnRef>
-          <a:fillRef idx="1">
-            <a:schemeClr val="accent1"/>
-          </a:fillRef>
-          <a:effectRef idx="0">
-            <a:schemeClr val="accent1"/>
-          </a:effectRef>
-          <a:fontRef idx="minor">
-            <a:schemeClr val="lt1"/>
-          </a:fontRef>
-        </p:style>
-        <p:txBody>
-          <a:bodyPr rtlCol="0" anchor="ctr"/>
-          <a:lstStyle/>
-          <a:p>
-            <a:pPr algn="ctr" rtl="0"/>
-            <a:endParaRPr lang="en-US" noProof="0" dirty="0"/>
-          </a:p>
-        </p:txBody>
-      </p:sp>
-      <p:sp>
-        <p:nvSpPr>
-          <p:cNvPr id="31" name="Rettangolo 30">
-            <a:extLst>
-              <a:ext uri="{FF2B5EF4-FFF2-40B4-BE49-F238E27FC236}">
-                <a16:creationId xmlns:a16="http://schemas.microsoft.com/office/drawing/2014/main" id="{12C05506-42A1-49C0-9D87-081CCD9023D6}"/>
-              </a:ext>
-              <a:ext uri="{C183D7F6-B498-43B3-948B-1728B52AA6E4}">
-                <adec:decorative xmlns:adec="http://schemas.microsoft.com/office/drawing/2017/decorative" val="1"/>
-              </a:ext>
-            </a:extLst>
-          </p:cNvPr>
-          <p:cNvSpPr>
-            <a:spLocks noChangeAspect="1"/>
-          </p:cNvSpPr>
-          <p:nvPr>
-            <p:extLst>
-              <p:ext uri="{386F3935-93C4-4BCD-93E2-E3B085C9AB24}">
-                <p16:designElem xmlns:p16="http://schemas.microsoft.com/office/powerpoint/2015/main" val="1"/>
-              </p:ext>
-            </p:extLst>
-          </p:nvPr>
-        </p:nvSpPr>
-        <p:spPr>
-          <a:xfrm>
-            <a:off x="447817" y="5141974"/>
-            <a:ext cx="11290860" cy="1258827"/>
-          </a:xfrm>
-          <a:prstGeom prst="rect">
-            <a:avLst/>
-          </a:prstGeom>
-          <a:solidFill>
-            <a:schemeClr val="accent1"/>
-          </a:solidFill>
-          <a:ln>
-            <a:noFill/>
-          </a:ln>
-          <a:effectLst/>
-        </p:spPr>
-        <p:style>
-          <a:lnRef idx="1">
-            <a:schemeClr val="accent1"/>
-          </a:lnRef>
-          <a:fillRef idx="3">
-            <a:schemeClr val="accent1"/>
-          </a:fillRef>
-          <a:effectRef idx="2">
-            <a:schemeClr val="accent1"/>
-          </a:effectRef>
-          <a:fontRef idx="minor">
-            <a:schemeClr val="lt1"/>
-          </a:fontRef>
-        </p:style>
-        <p:txBody>
-          <a:bodyPr/>
-          <a:lstStyle/>
-          <a:p>
-            <a:endParaRPr lang="en-US" noProof="0" dirty="0"/>
-          </a:p>
-        </p:txBody>
-      </p:sp>
-      <p:pic>
-        <p:nvPicPr>
-          <p:cNvPr id="11" name="Content Placeholder 10">
-            <a:extLst>
-              <a:ext uri="{FF2B5EF4-FFF2-40B4-BE49-F238E27FC236}">
-                <a16:creationId xmlns:a16="http://schemas.microsoft.com/office/drawing/2014/main" id="{A9C346CD-6787-58A7-B050-E5D27B1E5160}"/>
-              </a:ext>
-            </a:extLst>
-          </p:cNvPr>
-          <p:cNvPicPr>
-            <a:picLocks noGrp="1" noChangeAspect="1"/>
-          </p:cNvPicPr>
-          <p:nvPr>
-            <p:ph idx="1"/>
-          </p:nvPr>
-        </p:nvPicPr>
-        <p:blipFill>
-          <a:blip r:embed="rId3"/>
-          <a:stretch>
-            <a:fillRect/>
-          </a:stretch>
-        </p:blipFill>
-        <p:spPr>
-          <a:xfrm>
-            <a:off x="447817" y="874643"/>
-            <a:ext cx="2552700" cy="1790700"/>
-          </a:xfrm>
-          <a:prstGeom prst="rect">
-            <a:avLst/>
-          </a:prstGeom>
-        </p:spPr>
-      </p:pic>
-      <p:pic>
-        <p:nvPicPr>
-          <p:cNvPr id="13" name="Picture 12">
-            <a:extLst>
-              <a:ext uri="{FF2B5EF4-FFF2-40B4-BE49-F238E27FC236}">
-                <a16:creationId xmlns:a16="http://schemas.microsoft.com/office/drawing/2014/main" id="{E3AFE89D-EFA2-327F-DD3D-E0B8D695DE16}"/>
-              </a:ext>
-            </a:extLst>
-          </p:cNvPr>
-          <p:cNvPicPr>
-            <a:picLocks noChangeAspect="1"/>
-          </p:cNvPicPr>
-          <p:nvPr/>
-        </p:nvPicPr>
-        <p:blipFill>
-          <a:blip r:embed="rId4"/>
-          <a:stretch>
-            <a:fillRect/>
-          </a:stretch>
-        </p:blipFill>
-        <p:spPr>
-          <a:xfrm>
-            <a:off x="742395" y="3501157"/>
-            <a:ext cx="1662890" cy="1640817"/>
-          </a:xfrm>
-          <a:prstGeom prst="rect">
-            <a:avLst/>
-          </a:prstGeom>
-        </p:spPr>
-      </p:pic>
-      <p:pic>
-        <p:nvPicPr>
-          <p:cNvPr id="15" name="Picture 14">
-            <a:extLst>
-              <a:ext uri="{FF2B5EF4-FFF2-40B4-BE49-F238E27FC236}">
-                <a16:creationId xmlns:a16="http://schemas.microsoft.com/office/drawing/2014/main" id="{6402BF1E-26BF-B0D6-7E85-332B58EFE680}"/>
-              </a:ext>
-            </a:extLst>
-          </p:cNvPr>
-          <p:cNvPicPr>
-            <a:picLocks noChangeAspect="1"/>
-          </p:cNvPicPr>
-          <p:nvPr/>
-        </p:nvPicPr>
-        <p:blipFill>
-          <a:blip r:embed="rId5"/>
-          <a:stretch>
-            <a:fillRect/>
-          </a:stretch>
-        </p:blipFill>
-        <p:spPr>
-          <a:xfrm>
-            <a:off x="5791355" y="3226197"/>
-            <a:ext cx="1805682" cy="1805682"/>
-          </a:xfrm>
-          <a:prstGeom prst="rect">
-            <a:avLst/>
-          </a:prstGeom>
-        </p:spPr>
-      </p:pic>
-      <p:pic>
-        <p:nvPicPr>
-          <p:cNvPr id="17" name="Picture 16">
-            <a:extLst>
-              <a:ext uri="{FF2B5EF4-FFF2-40B4-BE49-F238E27FC236}">
-                <a16:creationId xmlns:a16="http://schemas.microsoft.com/office/drawing/2014/main" id="{BE2C0435-CC4D-B2A3-83CC-9873B5F4CBF6}"/>
-              </a:ext>
-            </a:extLst>
-          </p:cNvPr>
-          <p:cNvPicPr>
-            <a:picLocks noChangeAspect="1"/>
-          </p:cNvPicPr>
-          <p:nvPr/>
-        </p:nvPicPr>
-        <p:blipFill>
-          <a:blip r:embed="rId6"/>
-          <a:stretch>
-            <a:fillRect/>
-          </a:stretch>
-        </p:blipFill>
-        <p:spPr>
-          <a:xfrm>
-            <a:off x="3836731" y="1105612"/>
-            <a:ext cx="1640817" cy="1640817"/>
-          </a:xfrm>
-          <a:prstGeom prst="rect">
-            <a:avLst/>
-          </a:prstGeom>
-        </p:spPr>
-      </p:pic>
-      <p:pic>
-        <p:nvPicPr>
-          <p:cNvPr id="19" name="Picture 18">
-            <a:extLst>
-              <a:ext uri="{FF2B5EF4-FFF2-40B4-BE49-F238E27FC236}">
-                <a16:creationId xmlns:a16="http://schemas.microsoft.com/office/drawing/2014/main" id="{91C0672A-74AC-C65F-632F-F7CCC28E7685}"/>
-              </a:ext>
-            </a:extLst>
-          </p:cNvPr>
-          <p:cNvPicPr>
-            <a:picLocks noChangeAspect="1"/>
-          </p:cNvPicPr>
-          <p:nvPr/>
-        </p:nvPicPr>
-        <p:blipFill>
-          <a:blip r:embed="rId7"/>
-          <a:stretch>
-            <a:fillRect/>
-          </a:stretch>
-        </p:blipFill>
-        <p:spPr>
-          <a:xfrm>
-            <a:off x="3386070" y="2856524"/>
-            <a:ext cx="2091478" cy="2175355"/>
-          </a:xfrm>
-          <a:prstGeom prst="rect">
-            <a:avLst/>
-          </a:prstGeom>
-        </p:spPr>
-      </p:pic>
-      <p:graphicFrame>
-        <p:nvGraphicFramePr>
-          <p:cNvPr id="4" name="Table 3">
-            <a:extLst>
-              <a:ext uri="{FF2B5EF4-FFF2-40B4-BE49-F238E27FC236}">
-                <a16:creationId xmlns:a16="http://schemas.microsoft.com/office/drawing/2014/main" id="{50935930-435B-5BD9-A734-78D0B6C43017}"/>
-              </a:ext>
-            </a:extLst>
-          </p:cNvPr>
-          <p:cNvGraphicFramePr>
-            <a:graphicFrameLocks noGrp="1"/>
-          </p:cNvGraphicFramePr>
-          <p:nvPr>
-            <p:extLst>
-              <p:ext uri="{D42A27DB-BD31-4B8C-83A1-F6EECF244321}">
-                <p14:modId xmlns:p14="http://schemas.microsoft.com/office/powerpoint/2010/main" val="2924972922"/>
-              </p:ext>
-            </p:extLst>
-          </p:nvPr>
-        </p:nvGraphicFramePr>
-        <p:xfrm>
-          <a:off x="6535305" y="691365"/>
-          <a:ext cx="5203372" cy="2926235"/>
-        </p:xfrm>
-        <a:graphic>
-          <a:graphicData uri="http://schemas.openxmlformats.org/drawingml/2006/table">
-            <a:tbl>
-              <a:tblPr firstRow="1" bandRow="1">
-                <a:tableStyleId>{5C22544A-7EE6-4342-B048-85BDC9FD1C3A}</a:tableStyleId>
-              </a:tblPr>
-              <a:tblGrid>
-                <a:gridCol w="2074035">
-                  <a:extLst>
-                    <a:ext uri="{9D8B030D-6E8A-4147-A177-3AD203B41FA5}">
-                      <a16:colId xmlns:a16="http://schemas.microsoft.com/office/drawing/2014/main" val="3755693059"/>
-                    </a:ext>
-                  </a:extLst>
-                </a:gridCol>
-                <a:gridCol w="918016">
-                  <a:extLst>
-                    <a:ext uri="{9D8B030D-6E8A-4147-A177-3AD203B41FA5}">
-                      <a16:colId xmlns:a16="http://schemas.microsoft.com/office/drawing/2014/main" val="2136952612"/>
-                    </a:ext>
-                  </a:extLst>
-                </a:gridCol>
-                <a:gridCol w="2211321">
-                  <a:extLst>
-                    <a:ext uri="{9D8B030D-6E8A-4147-A177-3AD203B41FA5}">
-                      <a16:colId xmlns:a16="http://schemas.microsoft.com/office/drawing/2014/main" val="2786807148"/>
-                    </a:ext>
-                  </a:extLst>
-                </a:gridCol>
-              </a:tblGrid>
-              <a:tr h="441882">
-                <a:tc>
-                  <a:txBody>
-                    <a:bodyPr/>
-                    <a:lstStyle/>
-                    <a:p>
-                      <a:r>
-                        <a:rPr lang="en-US" noProof="0" dirty="0"/>
-                        <a:t>Component</a:t>
-                      </a:r>
-                      <a:endParaRPr lang="en-AE" dirty="0"/>
-                    </a:p>
-                  </a:txBody>
-                  <a:tcPr/>
-                </a:tc>
-                <a:tc>
-                  <a:txBody>
-                    <a:bodyPr/>
-                    <a:lstStyle/>
-                    <a:p>
-                      <a:r>
-                        <a:rPr lang="en-US" noProof="0" dirty="0"/>
-                        <a:t>Port</a:t>
-                      </a:r>
-                      <a:endParaRPr lang="en-AE" dirty="0"/>
-                    </a:p>
-                  </a:txBody>
-                  <a:tcPr/>
-                </a:tc>
-                <a:tc>
-                  <a:txBody>
-                    <a:bodyPr/>
-                    <a:lstStyle/>
-                    <a:p>
-                      <a:r>
-                        <a:rPr lang="en-US" noProof="0" dirty="0"/>
-                        <a:t>Purpose</a:t>
-                      </a:r>
-                      <a:endParaRPr lang="en-AE" dirty="0"/>
-                    </a:p>
-                  </a:txBody>
-                  <a:tcPr/>
-                </a:tc>
-                <a:extLst>
-                  <a:ext uri="{0D108BD9-81ED-4DB2-BD59-A6C34878D82A}">
-                    <a16:rowId xmlns:a16="http://schemas.microsoft.com/office/drawing/2014/main" val="506308983"/>
-                  </a:ext>
-                </a:extLst>
-              </a:tr>
-              <a:tr h="441882">
-                <a:tc>
-                  <a:txBody>
-                    <a:bodyPr/>
-                    <a:lstStyle/>
-                    <a:p>
-                      <a:r>
-                        <a:rPr lang="en-US" noProof="0" dirty="0"/>
-                        <a:t>Nextcloud</a:t>
-                      </a:r>
-                      <a:endParaRPr lang="en-AE" dirty="0"/>
-                    </a:p>
-                  </a:txBody>
-                  <a:tcPr/>
-                </a:tc>
-                <a:tc>
-                  <a:txBody>
-                    <a:bodyPr/>
-                    <a:lstStyle/>
-                    <a:p>
-                      <a:pPr algn="ctr"/>
-                      <a:r>
-                        <a:rPr lang="en-US" noProof="0" dirty="0"/>
-                        <a:t>8080</a:t>
-                      </a:r>
-                      <a:endParaRPr lang="en-AE" dirty="0"/>
-                    </a:p>
-                  </a:txBody>
-                  <a:tcPr/>
-                </a:tc>
-                <a:tc>
-                  <a:txBody>
-                    <a:bodyPr/>
-                    <a:lstStyle/>
-                    <a:p>
-                      <a:r>
-                        <a:rPr lang="en-US" noProof="0" dirty="0"/>
-                        <a:t>Main application </a:t>
-                      </a:r>
-                      <a:endParaRPr lang="en-AE" dirty="0"/>
-                    </a:p>
-                  </a:txBody>
-                  <a:tcPr/>
-                </a:tc>
-                <a:extLst>
-                  <a:ext uri="{0D108BD9-81ED-4DB2-BD59-A6C34878D82A}">
-                    <a16:rowId xmlns:a16="http://schemas.microsoft.com/office/drawing/2014/main" val="178143325"/>
-                  </a:ext>
-                </a:extLst>
-              </a:tr>
-              <a:tr h="441882">
-                <a:tc>
-                  <a:txBody>
-                    <a:bodyPr/>
-                    <a:lstStyle/>
-                    <a:p>
-                      <a:r>
-                        <a:rPr lang="en-US" noProof="0" dirty="0"/>
-                        <a:t>Nextcloud Exporter</a:t>
-                      </a:r>
-                      <a:endParaRPr lang="en-AE" dirty="0"/>
-                    </a:p>
-                  </a:txBody>
-                  <a:tcPr/>
-                </a:tc>
-                <a:tc>
-                  <a:txBody>
-                    <a:bodyPr/>
-                    <a:lstStyle/>
-                    <a:p>
-                      <a:pPr algn="ctr"/>
-                      <a:r>
-                        <a:rPr lang="en-US" noProof="0" dirty="0"/>
-                        <a:t>9205</a:t>
-                      </a:r>
-                      <a:endParaRPr lang="en-AE" dirty="0"/>
-                    </a:p>
-                  </a:txBody>
-                  <a:tcPr/>
-                </a:tc>
-                <a:tc>
-                  <a:txBody>
-                    <a:bodyPr/>
-                    <a:lstStyle/>
-                    <a:p>
-                      <a:r>
-                        <a:rPr lang="en-US" noProof="0" dirty="0"/>
-                        <a:t>Metrics exposure</a:t>
-                      </a:r>
-                      <a:endParaRPr lang="en-AE" dirty="0"/>
-                    </a:p>
-                  </a:txBody>
-                  <a:tcPr/>
-                </a:tc>
-                <a:extLst>
-                  <a:ext uri="{0D108BD9-81ED-4DB2-BD59-A6C34878D82A}">
-                    <a16:rowId xmlns:a16="http://schemas.microsoft.com/office/drawing/2014/main" val="1048574742"/>
-                  </a:ext>
-                </a:extLst>
-              </a:tr>
-              <a:tr h="441882">
-                <a:tc>
-                  <a:txBody>
-                    <a:bodyPr/>
-                    <a:lstStyle/>
-                    <a:p>
-                      <a:r>
-                        <a:rPr lang="en-US" noProof="0" dirty="0"/>
-                        <a:t>Prometheus</a:t>
-                      </a:r>
-                      <a:endParaRPr lang="en-AE" dirty="0"/>
-                    </a:p>
-                  </a:txBody>
-                  <a:tcPr/>
-                </a:tc>
-                <a:tc>
-                  <a:txBody>
-                    <a:bodyPr/>
-                    <a:lstStyle/>
-                    <a:p>
-                      <a:pPr algn="ctr"/>
-                      <a:r>
-                        <a:rPr lang="en-US" noProof="0" dirty="0"/>
-                        <a:t>9090</a:t>
-                      </a:r>
-                      <a:endParaRPr lang="en-AE" dirty="0"/>
-                    </a:p>
-                  </a:txBody>
-                  <a:tcPr/>
-                </a:tc>
-                <a:tc>
-                  <a:txBody>
-                    <a:bodyPr/>
-                    <a:lstStyle/>
-                    <a:p>
-                      <a:r>
-                        <a:rPr lang="en-US" noProof="0" dirty="0"/>
-                        <a:t>Time-series database</a:t>
-                      </a:r>
-                      <a:endParaRPr lang="en-AE" dirty="0"/>
-                    </a:p>
-                  </a:txBody>
-                  <a:tcPr/>
-                </a:tc>
-                <a:extLst>
-                  <a:ext uri="{0D108BD9-81ED-4DB2-BD59-A6C34878D82A}">
-                    <a16:rowId xmlns:a16="http://schemas.microsoft.com/office/drawing/2014/main" val="2734289960"/>
-                  </a:ext>
-                </a:extLst>
-              </a:tr>
-              <a:tr h="441882">
-                <a:tc>
-                  <a:txBody>
-                    <a:bodyPr/>
-                    <a:lstStyle/>
-                    <a:p>
-                      <a:r>
-                        <a:rPr lang="en-US" noProof="0" dirty="0"/>
-                        <a:t>Locust</a:t>
-                      </a:r>
-                      <a:endParaRPr lang="en-AE" dirty="0"/>
-                    </a:p>
-                  </a:txBody>
-                  <a:tcPr/>
-                </a:tc>
-                <a:tc>
-                  <a:txBody>
-                    <a:bodyPr/>
-                    <a:lstStyle/>
-                    <a:p>
-                      <a:pPr algn="ctr"/>
-                      <a:r>
-                        <a:rPr lang="en-US" noProof="0" dirty="0"/>
-                        <a:t>8089</a:t>
-                      </a:r>
-                      <a:endParaRPr lang="en-AE" dirty="0"/>
-                    </a:p>
-                  </a:txBody>
-                  <a:tcPr/>
-                </a:tc>
-                <a:tc>
-                  <a:txBody>
-                    <a:bodyPr/>
-                    <a:lstStyle/>
-                    <a:p>
-                      <a:r>
-                        <a:rPr lang="en-US" noProof="0" dirty="0"/>
-                        <a:t>Load testing</a:t>
-                      </a:r>
-                      <a:endParaRPr lang="en-AE" dirty="0"/>
-                    </a:p>
-                  </a:txBody>
-                  <a:tcPr/>
-                </a:tc>
-                <a:extLst>
-                  <a:ext uri="{0D108BD9-81ED-4DB2-BD59-A6C34878D82A}">
-                    <a16:rowId xmlns:a16="http://schemas.microsoft.com/office/drawing/2014/main" val="2302753732"/>
-                  </a:ext>
-                </a:extLst>
-              </a:tr>
-              <a:tr h="716825">
-                <a:tc>
-                  <a:txBody>
-                    <a:bodyPr/>
-                    <a:lstStyle/>
-                    <a:p>
-                      <a:r>
-                        <a:rPr lang="en-US" noProof="0" dirty="0"/>
-                        <a:t>Grafana</a:t>
-                      </a:r>
-                      <a:endParaRPr lang="en-AE" dirty="0"/>
-                    </a:p>
-                  </a:txBody>
-                  <a:tcPr/>
-                </a:tc>
-                <a:tc>
-                  <a:txBody>
-                    <a:bodyPr/>
-                    <a:lstStyle/>
-                    <a:p>
-                      <a:pPr algn="ctr"/>
-                      <a:r>
-                        <a:rPr lang="en-US" noProof="0" dirty="0"/>
-                        <a:t>3000</a:t>
-                      </a:r>
-                      <a:endParaRPr lang="en-AE" dirty="0"/>
-                    </a:p>
-                  </a:txBody>
-                  <a:tcPr/>
-                </a:tc>
-                <a:tc>
-                  <a:txBody>
-                    <a:bodyPr/>
-                    <a:lstStyle/>
-                    <a:p>
-                      <a:r>
-                        <a:rPr lang="en-US" noProof="0" dirty="0"/>
-                        <a:t>Visualization dashboard</a:t>
-                      </a:r>
-                      <a:endParaRPr lang="en-AE" dirty="0"/>
-                    </a:p>
-                  </a:txBody>
-                  <a:tcPr/>
-                </a:tc>
-                <a:extLst>
-                  <a:ext uri="{0D108BD9-81ED-4DB2-BD59-A6C34878D82A}">
-                    <a16:rowId xmlns:a16="http://schemas.microsoft.com/office/drawing/2014/main" val="1312596744"/>
-                  </a:ext>
-                </a:extLst>
-              </a:tr>
-            </a:tbl>
-          </a:graphicData>
-        </a:graphic>
-      </p:graphicFrame>
-      <p:sp>
-        <p:nvSpPr>
-          <p:cNvPr id="5" name="Title 4">
-            <a:extLst>
-              <a:ext uri="{FF2B5EF4-FFF2-40B4-BE49-F238E27FC236}">
-                <a16:creationId xmlns:a16="http://schemas.microsoft.com/office/drawing/2014/main" id="{5895318C-49D3-8393-8D91-EDEDB8C6D131}"/>
-              </a:ext>
-            </a:extLst>
-          </p:cNvPr>
-          <p:cNvSpPr>
-            <a:spLocks noGrp="1"/>
-          </p:cNvSpPr>
-          <p:nvPr>
-            <p:ph type="title"/>
-          </p:nvPr>
-        </p:nvSpPr>
-        <p:spPr/>
-        <p:txBody>
-          <a:bodyPr/>
-          <a:lstStyle/>
-          <a:p>
-            <a:endParaRPr lang="en-AE"/>
-          </a:p>
-        </p:txBody>
-      </p:sp>
-    </p:spTree>
-    <p:extLst>
-      <p:ext uri="{BB962C8B-B14F-4D97-AF65-F5344CB8AC3E}">
-        <p14:creationId xmlns:p14="http://schemas.microsoft.com/office/powerpoint/2010/main" val="1703342593"/>
-      </p:ext>
-    </p:extLst>
-  </p:cSld>
-  <p:clrMapOvr>
-    <a:masterClrMapping/>
-  </p:clrMapOvr>
-</p:sld>
-</file>
-
 <file path=ppt/slides/slide2.xml><?xml version="1.0" encoding="utf-8"?>
 <p:sld xmlns:a="http://schemas.openxmlformats.org/drawingml/2006/main" xmlns:r="http://schemas.openxmlformats.org/officeDocument/2006/relationships" xmlns:p="http://schemas.openxmlformats.org/presentationml/2006/main">
   <p:cSld>
@@ -24418,177 +23206,6 @@
           </a:p>
         </p:txBody>
       </p:sp>
-      <p:sp>
-        <p:nvSpPr>
-          <p:cNvPr id="3" name="Content Placeholder 2">
-            <a:extLst>
-              <a:ext uri="{FF2B5EF4-FFF2-40B4-BE49-F238E27FC236}">
-                <a16:creationId xmlns:a16="http://schemas.microsoft.com/office/drawing/2014/main" id="{F522A5D2-2227-44DF-60E2-F77BB3D9A224}"/>
-              </a:ext>
-            </a:extLst>
-          </p:cNvPr>
-          <p:cNvSpPr>
-            <a:spLocks noGrp="1"/>
-          </p:cNvSpPr>
-          <p:nvPr>
-            <p:ph idx="1"/>
-          </p:nvPr>
-        </p:nvSpPr>
-        <p:spPr>
-          <a:xfrm>
-            <a:off x="581192" y="2220686"/>
-            <a:ext cx="7019757" cy="4434114"/>
-          </a:xfrm>
-        </p:spPr>
-        <p:txBody>
-          <a:bodyPr>
-            <a:noAutofit/>
-          </a:bodyPr>
-          <a:lstStyle/>
-          <a:p>
-            <a:r>
-              <a:rPr lang="en-US" sz="2000" b="1" noProof="0" dirty="0"/>
-              <a:t>Objective:</a:t>
-            </a:r>
-            <a:r>
-              <a:rPr lang="en-US" sz="2000" noProof="0" dirty="0"/>
-              <a:t> Deploy a self-hosted cloud storage platform with monitoring and performance testing capabilities</a:t>
-            </a:r>
-          </a:p>
-          <a:p>
-            <a:r>
-              <a:rPr lang="en-US" sz="2000" b="1" noProof="0" dirty="0"/>
-              <a:t>Key Components:</a:t>
-            </a:r>
-            <a:br>
-              <a:rPr lang="en-US" sz="2000" noProof="0" dirty="0"/>
-            </a:br>
-            <a:r>
-              <a:rPr lang="en-US" sz="2000" noProof="0" dirty="0"/>
-              <a:t>- </a:t>
-            </a:r>
-            <a:r>
-              <a:rPr lang="en-US" sz="2000" b="1" noProof="0" dirty="0"/>
-              <a:t>Nextcloud</a:t>
-            </a:r>
-            <a:r>
-              <a:rPr lang="en-US" sz="2000" noProof="0" dirty="0"/>
-              <a:t>: File storage and user management</a:t>
-            </a:r>
-            <a:br>
-              <a:rPr lang="en-US" sz="2000" noProof="0" dirty="0"/>
-            </a:br>
-            <a:r>
-              <a:rPr lang="en-US" sz="2000" noProof="0" dirty="0"/>
-              <a:t>- </a:t>
-            </a:r>
-            <a:r>
-              <a:rPr lang="en-US" sz="2000" b="1" noProof="0" dirty="0"/>
-              <a:t>Docker Compose</a:t>
-            </a:r>
-            <a:r>
-              <a:rPr lang="en-US" sz="2000" noProof="0" dirty="0"/>
-              <a:t>: Container orchestration</a:t>
-            </a:r>
-            <a:br>
-              <a:rPr lang="en-US" sz="2000" noProof="0" dirty="0"/>
-            </a:br>
-            <a:r>
-              <a:rPr lang="en-US" sz="2000" noProof="0" dirty="0"/>
-              <a:t>- </a:t>
-            </a:r>
-            <a:r>
-              <a:rPr lang="en-US" sz="2000" b="1" noProof="0" dirty="0"/>
-              <a:t>Prometheus + Grafana</a:t>
-            </a:r>
-            <a:r>
-              <a:rPr lang="en-US" sz="2000" noProof="0" dirty="0"/>
-              <a:t>: Monitoring and visualization</a:t>
-            </a:r>
-            <a:br>
-              <a:rPr lang="en-US" sz="2000" noProof="0" dirty="0"/>
-            </a:br>
-            <a:r>
-              <a:rPr lang="en-US" sz="2000" noProof="0" dirty="0"/>
-              <a:t>- </a:t>
-            </a:r>
-            <a:r>
-              <a:rPr lang="en-US" sz="2000" b="1" noProof="0" dirty="0"/>
-              <a:t>Locust</a:t>
-            </a:r>
-            <a:r>
-              <a:rPr lang="en-US" sz="2000" noProof="0" dirty="0"/>
-              <a:t>: Load testing and performance analysis</a:t>
-            </a:r>
-          </a:p>
-          <a:p>
-            <a:r>
-              <a:rPr lang="en-US" sz="2000" b="1" noProof="0" dirty="0"/>
-              <a:t>Requirements Addressed:</a:t>
-            </a:r>
-            <a:br>
-              <a:rPr lang="en-US" sz="2000" noProof="0" dirty="0"/>
-            </a:br>
-            <a:r>
-              <a:rPr lang="en-US" sz="2000" noProof="0" dirty="0">
-                <a:solidFill>
-                  <a:srgbClr val="00B050"/>
-                </a:solidFill>
-              </a:rPr>
-              <a:t>✓</a:t>
-            </a:r>
-            <a:r>
-              <a:rPr lang="en-US" sz="2000" noProof="0" dirty="0"/>
-              <a:t> User authentication &amp; authorization  </a:t>
-            </a:r>
-            <a:br>
-              <a:rPr lang="en-US" sz="2000" noProof="0" dirty="0"/>
-            </a:br>
-            <a:r>
-              <a:rPr lang="en-US" sz="2000" noProof="0" dirty="0">
-                <a:solidFill>
-                  <a:srgbClr val="00B050"/>
-                </a:solidFill>
-              </a:rPr>
-              <a:t>✓</a:t>
-            </a:r>
-            <a:r>
-              <a:rPr lang="en-US" sz="2000" noProof="0" dirty="0"/>
-              <a:t> Private storage spaces  </a:t>
-            </a:r>
-            <a:br>
-              <a:rPr lang="en-US" sz="2000" noProof="0" dirty="0"/>
-            </a:br>
-            <a:r>
-              <a:rPr lang="en-US" sz="2000" noProof="0" dirty="0">
-                <a:solidFill>
-                  <a:srgbClr val="00B050"/>
-                </a:solidFill>
-              </a:rPr>
-              <a:t>✓</a:t>
-            </a:r>
-            <a:r>
-              <a:rPr lang="en-US" sz="2000" noProof="0" dirty="0"/>
-              <a:t> File operations (upload/download/delete)  </a:t>
-            </a:r>
-            <a:br>
-              <a:rPr lang="en-US" sz="2000" noProof="0" dirty="0"/>
-            </a:br>
-            <a:r>
-              <a:rPr lang="en-US" sz="2000" noProof="0" dirty="0">
-                <a:solidFill>
-                  <a:srgbClr val="00B050"/>
-                </a:solidFill>
-              </a:rPr>
-              <a:t>✓</a:t>
-            </a:r>
-            <a:r>
-              <a:rPr lang="en-US" sz="2000" noProof="0" dirty="0"/>
-              <a:t> Scalability, security, and cost-efficiency  </a:t>
-            </a:r>
-          </a:p>
-        </p:txBody>
-      </p:sp>
       <p:pic>
         <p:nvPicPr>
           <p:cNvPr id="5" name="Picture 4">
@@ -24611,7 +23228,7 @@
         </p:blipFill>
         <p:spPr>
           <a:xfrm>
-            <a:off x="8790955" y="3501228"/>
+            <a:off x="7907035" y="2367303"/>
             <a:ext cx="1640817" cy="1640817"/>
           </a:xfrm>
           <a:prstGeom prst="rect">
@@ -24619,6 +23236,347 @@
           </a:prstGeom>
         </p:spPr>
       </p:pic>
+      <p:sp>
+        <p:nvSpPr>
+          <p:cNvPr id="4" name="Rectangle: Rounded Corners 3">
+            <a:extLst>
+              <a:ext uri="{FF2B5EF4-FFF2-40B4-BE49-F238E27FC236}">
+                <a16:creationId xmlns:a16="http://schemas.microsoft.com/office/drawing/2014/main" id="{28F79B58-F792-98A2-FF9E-6D0A20BEC198}"/>
+              </a:ext>
+            </a:extLst>
+          </p:cNvPr>
+          <p:cNvSpPr/>
+          <p:nvPr/>
+        </p:nvSpPr>
+        <p:spPr>
+          <a:xfrm>
+            <a:off x="408580" y="2220418"/>
+            <a:ext cx="5016859" cy="1787702"/>
+          </a:xfrm>
+          <a:prstGeom prst="roundRect">
+            <a:avLst/>
+          </a:prstGeom>
+          <a:gradFill flip="none" rotWithShape="1">
+            <a:gsLst>
+              <a:gs pos="0">
+                <a:srgbClr val="299EFF">
+                  <a:alpha val="86000"/>
+                  <a:lumMod val="99000"/>
+                </a:srgbClr>
+              </a:gs>
+              <a:gs pos="100000">
+                <a:srgbClr val="006BC0"/>
+              </a:gs>
+            </a:gsLst>
+            <a:lin ang="5400000" scaled="1"/>
+            <a:tileRect/>
+          </a:gradFill>
+          <a:effectLst>
+            <a:outerShdw blurRad="317500" dist="38100" dir="2700000" sx="106000" sy="106000" algn="tl" rotWithShape="0">
+              <a:prstClr val="black">
+                <a:alpha val="19000"/>
+              </a:prstClr>
+            </a:outerShdw>
+          </a:effectLst>
+        </p:spPr>
+        <p:style>
+          <a:lnRef idx="2">
+            <a:schemeClr val="accent1">
+              <a:shade val="15000"/>
+            </a:schemeClr>
+          </a:lnRef>
+          <a:fillRef idx="1">
+            <a:schemeClr val="accent1"/>
+          </a:fillRef>
+          <a:effectRef idx="0">
+            <a:schemeClr val="accent1"/>
+          </a:effectRef>
+          <a:fontRef idx="minor">
+            <a:schemeClr val="lt1"/>
+          </a:fontRef>
+        </p:style>
+        <p:txBody>
+          <a:bodyPr rtlCol="0" anchor="ctr"/>
+          <a:lstStyle/>
+          <a:p>
+            <a:r>
+              <a:rPr lang="en-US" b="1" dirty="0"/>
+              <a:t>Objective:</a:t>
+            </a:r>
+            <a:r>
+              <a:rPr lang="en-US" dirty="0"/>
+              <a:t> </a:t>
+            </a:r>
+            <a:br>
+              <a:rPr lang="en-US" dirty="0"/>
+            </a:br>
+            <a:r>
+              <a:rPr lang="en-US" dirty="0"/>
+              <a:t>Deploy a self-hosted cloud storage platform with monitoring and performance testing capabilities</a:t>
+            </a:r>
+          </a:p>
+        </p:txBody>
+      </p:sp>
+      <p:sp>
+        <p:nvSpPr>
+          <p:cNvPr id="6" name="Rectangle: Rounded Corners 5">
+            <a:extLst>
+              <a:ext uri="{FF2B5EF4-FFF2-40B4-BE49-F238E27FC236}">
+                <a16:creationId xmlns:a16="http://schemas.microsoft.com/office/drawing/2014/main" id="{3F4033EC-0B61-0C65-3319-0880B2E07EA4}"/>
+              </a:ext>
+            </a:extLst>
+          </p:cNvPr>
+          <p:cNvSpPr/>
+          <p:nvPr/>
+        </p:nvSpPr>
+        <p:spPr>
+          <a:xfrm>
+            <a:off x="5974079" y="4519080"/>
+            <a:ext cx="5912397" cy="1920113"/>
+          </a:xfrm>
+          <a:prstGeom prst="roundRect">
+            <a:avLst/>
+          </a:prstGeom>
+          <a:gradFill flip="none" rotWithShape="1">
+            <a:gsLst>
+              <a:gs pos="0">
+                <a:srgbClr val="299EFF">
+                  <a:alpha val="86000"/>
+                  <a:lumMod val="99000"/>
+                </a:srgbClr>
+              </a:gs>
+              <a:gs pos="100000">
+                <a:srgbClr val="006BC0"/>
+              </a:gs>
+            </a:gsLst>
+            <a:lin ang="5400000" scaled="1"/>
+            <a:tileRect/>
+          </a:gradFill>
+          <a:effectLst>
+            <a:outerShdw blurRad="317500" dist="38100" dir="2700000" sx="106000" sy="106000" algn="tl" rotWithShape="0">
+              <a:prstClr val="black">
+                <a:alpha val="19000"/>
+              </a:prstClr>
+            </a:outerShdw>
+          </a:effectLst>
+        </p:spPr>
+        <p:style>
+          <a:lnRef idx="2">
+            <a:schemeClr val="accent1">
+              <a:shade val="15000"/>
+            </a:schemeClr>
+          </a:lnRef>
+          <a:fillRef idx="1">
+            <a:schemeClr val="accent1"/>
+          </a:fillRef>
+          <a:effectRef idx="0">
+            <a:schemeClr val="accent1"/>
+          </a:effectRef>
+          <a:fontRef idx="minor">
+            <a:schemeClr val="lt1"/>
+          </a:fontRef>
+        </p:style>
+        <p:txBody>
+          <a:bodyPr rtlCol="0" anchor="ctr"/>
+          <a:lstStyle/>
+          <a:p>
+            <a:r>
+              <a:rPr lang="en-US" b="1" dirty="0"/>
+              <a:t>Key Components:</a:t>
+            </a:r>
+            <a:br>
+              <a:rPr lang="en-US" dirty="0"/>
+            </a:br>
+            <a:r>
+              <a:rPr lang="en-US" dirty="0"/>
+              <a:t>- </a:t>
+            </a:r>
+            <a:r>
+              <a:rPr lang="en-US" b="1" dirty="0" err="1"/>
+              <a:t>Nextcloud</a:t>
+            </a:r>
+            <a:r>
+              <a:rPr lang="en-US" dirty="0"/>
+              <a:t>: File storage and user management</a:t>
+            </a:r>
+            <a:br>
+              <a:rPr lang="en-US" dirty="0"/>
+            </a:br>
+            <a:r>
+              <a:rPr lang="en-US" dirty="0"/>
+              <a:t>- </a:t>
+            </a:r>
+            <a:r>
+              <a:rPr lang="en-US" b="1" dirty="0"/>
+              <a:t>Docker Compose</a:t>
+            </a:r>
+            <a:r>
+              <a:rPr lang="en-US" dirty="0"/>
+              <a:t>: Container orchestration</a:t>
+            </a:r>
+            <a:br>
+              <a:rPr lang="en-US" dirty="0"/>
+            </a:br>
+            <a:r>
+              <a:rPr lang="en-US" dirty="0"/>
+              <a:t>- </a:t>
+            </a:r>
+            <a:r>
+              <a:rPr lang="en-US" b="1" dirty="0"/>
+              <a:t>Prometheus + Grafana</a:t>
+            </a:r>
+            <a:r>
+              <a:rPr lang="en-US" dirty="0"/>
+              <a:t>: Monitoring and visualization</a:t>
+            </a:r>
+            <a:br>
+              <a:rPr lang="en-US" dirty="0"/>
+            </a:br>
+            <a:r>
+              <a:rPr lang="en-US" dirty="0"/>
+              <a:t>- </a:t>
+            </a:r>
+            <a:r>
+              <a:rPr lang="en-US" b="1" dirty="0"/>
+              <a:t>Locust</a:t>
+            </a:r>
+            <a:r>
+              <a:rPr lang="en-US" dirty="0"/>
+              <a:t>: Load testing and performance analysis</a:t>
+            </a:r>
+          </a:p>
+        </p:txBody>
+      </p:sp>
+      <p:sp>
+        <p:nvSpPr>
+          <p:cNvPr id="7" name="Rectangle: Rounded Corners 6">
+            <a:extLst>
+              <a:ext uri="{FF2B5EF4-FFF2-40B4-BE49-F238E27FC236}">
+                <a16:creationId xmlns:a16="http://schemas.microsoft.com/office/drawing/2014/main" id="{79970B82-396B-4133-93DC-1CAF3E364D6C}"/>
+              </a:ext>
+            </a:extLst>
+          </p:cNvPr>
+          <p:cNvSpPr/>
+          <p:nvPr/>
+        </p:nvSpPr>
+        <p:spPr>
+          <a:xfrm>
+            <a:off x="405932" y="4519079"/>
+            <a:ext cx="5019508" cy="1920113"/>
+          </a:xfrm>
+          <a:prstGeom prst="roundRect">
+            <a:avLst/>
+          </a:prstGeom>
+          <a:gradFill flip="none" rotWithShape="1">
+            <a:gsLst>
+              <a:gs pos="0">
+                <a:srgbClr val="299EFF">
+                  <a:alpha val="86000"/>
+                  <a:lumMod val="99000"/>
+                </a:srgbClr>
+              </a:gs>
+              <a:gs pos="100000">
+                <a:srgbClr val="006BC0"/>
+              </a:gs>
+            </a:gsLst>
+            <a:lin ang="5400000" scaled="1"/>
+            <a:tileRect/>
+          </a:gradFill>
+          <a:effectLst>
+            <a:outerShdw blurRad="317500" dist="38100" dir="2700000" sx="106000" sy="106000" algn="tl" rotWithShape="0">
+              <a:prstClr val="black">
+                <a:alpha val="19000"/>
+              </a:prstClr>
+            </a:outerShdw>
+          </a:effectLst>
+        </p:spPr>
+        <p:style>
+          <a:lnRef idx="2">
+            <a:schemeClr val="accent1">
+              <a:shade val="15000"/>
+            </a:schemeClr>
+          </a:lnRef>
+          <a:fillRef idx="1">
+            <a:schemeClr val="accent1"/>
+          </a:fillRef>
+          <a:effectRef idx="0">
+            <a:schemeClr val="accent1"/>
+          </a:effectRef>
+          <a:fontRef idx="minor">
+            <a:schemeClr val="lt1"/>
+          </a:fontRef>
+        </p:style>
+        <p:txBody>
+          <a:bodyPr rtlCol="0" anchor="ctr"/>
+          <a:lstStyle/>
+          <a:p>
+            <a:r>
+              <a:rPr lang="en-US" b="1" dirty="0"/>
+              <a:t>Requirements Addressed:</a:t>
+            </a:r>
+            <a:br>
+              <a:rPr lang="en-US" dirty="0"/>
+            </a:br>
+            <a:r>
+              <a:rPr lang="en-US" dirty="0">
+                <a:solidFill>
+                  <a:srgbClr val="00B050"/>
+                </a:solidFill>
+              </a:rPr>
+              <a:t>✓</a:t>
+            </a:r>
+            <a:r>
+              <a:rPr lang="en-US" dirty="0"/>
+              <a:t> User authentication &amp; authorization  </a:t>
+            </a:r>
+            <a:br>
+              <a:rPr lang="en-US" dirty="0"/>
+            </a:br>
+            <a:r>
+              <a:rPr lang="en-US" dirty="0">
+                <a:solidFill>
+                  <a:srgbClr val="00B050"/>
+                </a:solidFill>
+              </a:rPr>
+              <a:t>✓</a:t>
+            </a:r>
+            <a:r>
+              <a:rPr lang="en-US" dirty="0"/>
+              <a:t> Private storage spaces  </a:t>
+            </a:r>
+            <a:br>
+              <a:rPr lang="en-US" dirty="0"/>
+            </a:br>
+            <a:r>
+              <a:rPr lang="en-US" dirty="0">
+                <a:solidFill>
+                  <a:srgbClr val="00B050"/>
+                </a:solidFill>
+              </a:rPr>
+              <a:t>✓</a:t>
+            </a:r>
+            <a:r>
+              <a:rPr lang="en-US" dirty="0"/>
+              <a:t> File operations (upload/download/delete)  </a:t>
+            </a:r>
+            <a:br>
+              <a:rPr lang="en-US" dirty="0"/>
+            </a:br>
+            <a:r>
+              <a:rPr lang="en-US" dirty="0">
+                <a:solidFill>
+                  <a:srgbClr val="00B050"/>
+                </a:solidFill>
+              </a:rPr>
+              <a:t>✓</a:t>
+            </a:r>
+            <a:r>
+              <a:rPr lang="en-US" dirty="0"/>
+              <a:t> Scalability, security, and cost-efficiency</a:t>
+            </a:r>
+          </a:p>
+        </p:txBody>
+      </p:sp>
     </p:spTree>
     <p:extLst>
       <p:ext uri="{BB962C8B-B14F-4D97-AF65-F5344CB8AC3E}">
@@ -25829,256 +24787,6 @@
           <p:cNvPr id="2" name="Title 1">
             <a:extLst>
               <a:ext uri="{FF2B5EF4-FFF2-40B4-BE49-F238E27FC236}">
-                <a16:creationId xmlns:a16="http://schemas.microsoft.com/office/drawing/2014/main" id="{8C99A125-9917-BC49-0DEF-7656D72B4245}"/>
-              </a:ext>
-            </a:extLst>
-          </p:cNvPr>
-          <p:cNvSpPr>
-            <a:spLocks noGrp="1"/>
-          </p:cNvSpPr>
-          <p:nvPr>
-            <p:ph type="title"/>
-          </p:nvPr>
-        </p:nvSpPr>
-        <p:spPr/>
-        <p:txBody>
-          <a:bodyPr>
-            <a:normAutofit/>
-          </a:bodyPr>
-          <a:lstStyle/>
-          <a:p>
-            <a:r>
-              <a:rPr lang="en-US" sz="3200" noProof="0" dirty="0"/>
-              <a:t>Load Testing with Locust</a:t>
-            </a:r>
-          </a:p>
-        </p:txBody>
-      </p:sp>
-      <p:sp>
-        <p:nvSpPr>
-          <p:cNvPr id="3" name="Content Placeholder 2">
-            <a:extLst>
-              <a:ext uri="{FF2B5EF4-FFF2-40B4-BE49-F238E27FC236}">
-                <a16:creationId xmlns:a16="http://schemas.microsoft.com/office/drawing/2014/main" id="{EF2AADA9-52B6-62C7-4744-38DC507C6CF3}"/>
-              </a:ext>
-            </a:extLst>
-          </p:cNvPr>
-          <p:cNvSpPr>
-            <a:spLocks noGrp="1"/>
-          </p:cNvSpPr>
-          <p:nvPr>
-            <p:ph idx="1"/>
-          </p:nvPr>
-        </p:nvSpPr>
-        <p:spPr/>
-        <p:txBody>
-          <a:bodyPr>
-            <a:normAutofit fontScale="62500" lnSpcReduction="20000"/>
-          </a:bodyPr>
-          <a:lstStyle/>
-          <a:p>
-            <a:pPr marL="0" indent="0">
-              <a:buNone/>
-            </a:pPr>
-            <a:br>
-              <a:rPr lang="en-US" noProof="0" dirty="0"/>
-            </a:br>
-            <a:r>
-              <a:rPr lang="en-US" noProof="0" dirty="0"/>
-              <a:t>**Testing Framework: Locust**</a:t>
-            </a:r>
-            <a:br>
-              <a:rPr lang="en-US" noProof="0" dirty="0"/>
-            </a:br>
-            <a:br>
-              <a:rPr lang="en-US" noProof="0" dirty="0"/>
-            </a:br>
-            <a:r>
-              <a:rPr lang="en-US" noProof="0" dirty="0"/>
-              <a:t>**Test Configuration:**</a:t>
-            </a:r>
-            <a:br>
-              <a:rPr lang="en-US" noProof="0" dirty="0"/>
-            </a:br>
-            <a:r>
-              <a:rPr lang="en-US" noProof="0" dirty="0"/>
-              <a:t>- **Script**: `locust-tasks/tasks.py`</a:t>
-            </a:r>
-            <a:br>
-              <a:rPr lang="en-US" noProof="0" dirty="0"/>
-            </a:br>
-            <a:r>
-              <a:rPr lang="en-US" noProof="0" dirty="0"/>
-              <a:t>- **User simulation**: </a:t>
-            </a:r>
-            <a:r>
-              <a:rPr lang="en-US" noProof="0" dirty="0" err="1"/>
-              <a:t>WebDavUser</a:t>
-            </a:r>
-            <a:r>
-              <a:rPr lang="en-US" noProof="0" dirty="0"/>
-              <a:t> class</a:t>
-            </a:r>
-            <a:br>
-              <a:rPr lang="en-US" noProof="0" dirty="0"/>
-            </a:br>
-            <a:r>
-              <a:rPr lang="en-US" noProof="0" dirty="0"/>
-              <a:t>- **Authentication**: Basic Auth (username/password)</a:t>
-            </a:r>
-            <a:br>
-              <a:rPr lang="en-US" noProof="0" dirty="0"/>
-            </a:br>
-            <a:r>
-              <a:rPr lang="en-US" noProof="0" dirty="0"/>
-              <a:t>- **Wait time**: 1-3 seconds between tasks</a:t>
-            </a:r>
-            <a:br>
-              <a:rPr lang="en-US" noProof="0" dirty="0"/>
-            </a:br>
-            <a:br>
-              <a:rPr lang="en-US" noProof="0" dirty="0"/>
-            </a:br>
-            <a:r>
-              <a:rPr lang="en-US" noProof="0" dirty="0"/>
-              <a:t>**Test Tasks:**</a:t>
-            </a:r>
-            <a:br>
-              <a:rPr lang="en-US" noProof="0" dirty="0"/>
-            </a:br>
-            <a:r>
-              <a:rPr lang="en-US" noProof="0" dirty="0"/>
-              <a:t>```python</a:t>
-            </a:r>
-            <a:br>
-              <a:rPr lang="en-US" noProof="0" dirty="0"/>
-            </a:br>
-            <a:r>
-              <a:rPr lang="en-US" noProof="0" dirty="0"/>
-              <a:t>@task(2)  # 40% weight</a:t>
-            </a:r>
-            <a:br>
-              <a:rPr lang="en-US" noProof="0" dirty="0"/>
-            </a:br>
-            <a:r>
-              <a:rPr lang="en-US" noProof="0" dirty="0"/>
-              <a:t>def upload(self):    # PUT request</a:t>
-            </a:r>
-            <a:br>
-              <a:rPr lang="en-US" noProof="0" dirty="0"/>
-            </a:br>
-            <a:r>
-              <a:rPr lang="en-US" noProof="0" dirty="0"/>
-              <a:t>    </a:t>
-            </a:r>
-            <a:br>
-              <a:rPr lang="en-US" noProof="0" dirty="0"/>
-            </a:br>
-            <a:r>
-              <a:rPr lang="en-US" noProof="0" dirty="0"/>
-              <a:t>@task(2)  # 40% weight</a:t>
-            </a:r>
-            <a:br>
-              <a:rPr lang="en-US" noProof="0" dirty="0"/>
-            </a:br>
-            <a:r>
-              <a:rPr lang="en-US" noProof="0" dirty="0"/>
-              <a:t>def download(self):  # GET request</a:t>
-            </a:r>
-            <a:br>
-              <a:rPr lang="en-US" noProof="0" dirty="0"/>
-            </a:br>
-            <a:r>
-              <a:rPr lang="en-US" noProof="0" dirty="0"/>
-              <a:t>    </a:t>
-            </a:r>
-            <a:br>
-              <a:rPr lang="en-US" noProof="0" dirty="0"/>
-            </a:br>
-            <a:r>
-              <a:rPr lang="en-US" noProof="0" dirty="0"/>
-              <a:t>@task(1)  # 20% weight</a:t>
-            </a:r>
-            <a:br>
-              <a:rPr lang="en-US" noProof="0" dirty="0"/>
-            </a:br>
-            <a:r>
-              <a:rPr lang="en-US" noProof="0" dirty="0"/>
-              <a:t>def delete(self):    # DELETE request</a:t>
-            </a:r>
-            <a:br>
-              <a:rPr lang="en-US" noProof="0" dirty="0"/>
-            </a:br>
-            <a:r>
-              <a:rPr lang="en-US" noProof="0" dirty="0"/>
-              <a:t>```</a:t>
-            </a:r>
-            <a:br>
-              <a:rPr lang="en-US" noProof="0" dirty="0"/>
-            </a:br>
-            <a:br>
-              <a:rPr lang="en-US" noProof="0" dirty="0"/>
-            </a:br>
-            <a:r>
-              <a:rPr lang="en-US" noProof="0" dirty="0"/>
-              <a:t>**Access**: `</a:t>
-            </a:r>
-            <a:r>
-              <a:rPr lang="en-US" i="1" noProof="0" dirty="0"/>
-              <a:t>http://localhost:8089</a:t>
-            </a:r>
-            <a:r>
-              <a:rPr lang="en-US" noProof="0" dirty="0"/>
-              <a:t>`</a:t>
-            </a:r>
-            <a:br>
-              <a:rPr lang="en-US" noProof="0" dirty="0"/>
-            </a:br>
-            <a:br>
-              <a:rPr lang="en-US" noProof="0" dirty="0"/>
-            </a:br>
-            <a:r>
-              <a:rPr lang="en-US" noProof="0" dirty="0"/>
-              <a:t>**[INSERT: Screenshot of Locust web interface]**</a:t>
-            </a:r>
-          </a:p>
-        </p:txBody>
-      </p:sp>
-    </p:spTree>
-    <p:extLst>
-      <p:ext uri="{BB962C8B-B14F-4D97-AF65-F5344CB8AC3E}">
-        <p14:creationId xmlns:p14="http://schemas.microsoft.com/office/powerpoint/2010/main" val="3066509393"/>
-      </p:ext>
-    </p:extLst>
-  </p:cSld>
-  <p:clrMapOvr>
-    <a:masterClrMapping/>
-  </p:clrMapOvr>
-</p:sld>
-</file>
-
-<file path=ppt/slides/slide7.xml><?xml version="1.0" encoding="utf-8"?>
-<p:sld xmlns:a="http://schemas.openxmlformats.org/drawingml/2006/main" xmlns:r="http://schemas.openxmlformats.org/officeDocument/2006/relationships" xmlns:p="http://schemas.openxmlformats.org/presentationml/2006/main">
-  <p:cSld>
-    <p:spTree>
-      <p:nvGrpSpPr>
-        <p:cNvPr id="1" name=""/>
-        <p:cNvGrpSpPr/>
-        <p:nvPr/>
-      </p:nvGrpSpPr>
-      <p:grpSpPr>
-        <a:xfrm>
-          <a:off x="0" y="0"/>
-          <a:ext cx="0" cy="0"/>
-          <a:chOff x="0" y="0"/>
-          <a:chExt cx="0" cy="0"/>
-        </a:xfrm>
-      </p:grpSpPr>
-      <p:sp>
-        <p:nvSpPr>
-          <p:cNvPr id="2" name="Title 1">
-            <a:extLst>
-              <a:ext uri="{FF2B5EF4-FFF2-40B4-BE49-F238E27FC236}">
                 <a16:creationId xmlns:a16="http://schemas.microsoft.com/office/drawing/2014/main" id="{174E2DD9-0427-CA16-1252-3D19FB221EEE}"/>
               </a:ext>
             </a:extLst>
@@ -26128,8 +24836,8 @@
         </p:blipFill>
         <p:spPr>
           <a:xfrm>
-            <a:off x="6692136" y="2382936"/>
-            <a:ext cx="4708144" cy="3678238"/>
+            <a:off x="6096000" y="2092790"/>
+            <a:ext cx="6096000" cy="4762501"/>
           </a:xfrm>
           <a:prstGeom prst="rect">
             <a:avLst/>
@@ -26158,8 +24866,8 @@
         </p:blipFill>
         <p:spPr>
           <a:xfrm>
-            <a:off x="906021" y="2384981"/>
-            <a:ext cx="4708144" cy="3676193"/>
+            <a:off x="0" y="2098147"/>
+            <a:ext cx="6096000" cy="4759853"/>
           </a:xfrm>
           <a:prstGeom prst="rect">
             <a:avLst/>
@@ -26209,7 +24917,7 @@
 </p:sld>
 </file>
 
-<file path=ppt/slides/slide8.xml><?xml version="1.0" encoding="utf-8"?>
+<file path=ppt/slides/slide7.xml><?xml version="1.0" encoding="utf-8"?>
 <p:sld xmlns:a="http://schemas.openxmlformats.org/drawingml/2006/main" xmlns:r="http://schemas.openxmlformats.org/officeDocument/2006/relationships" xmlns:p="http://schemas.openxmlformats.org/presentationml/2006/main">
   <p:cSld>
     <p:spTree>
@@ -26280,8 +24988,8 @@
         </p:blipFill>
         <p:spPr>
           <a:xfrm>
-            <a:off x="6698525" y="2385998"/>
-            <a:ext cx="4710761" cy="3678238"/>
+            <a:off x="6096001" y="2095500"/>
+            <a:ext cx="6096000" cy="4755233"/>
           </a:xfrm>
           <a:prstGeom prst="rect">
             <a:avLst/>
@@ -26310,8 +25018,8 @@
         </p:blipFill>
         <p:spPr>
           <a:xfrm>
-            <a:off x="903780" y="2383954"/>
-            <a:ext cx="4710761" cy="3680282"/>
+            <a:off x="0" y="2095500"/>
+            <a:ext cx="6096000" cy="4762500"/>
           </a:xfrm>
           <a:prstGeom prst="rect">
             <a:avLst/>
@@ -26361,7 +25069,7 @@
 </p:sld>
 </file>
 
-<file path=ppt/slides/slide9.xml><?xml version="1.0" encoding="utf-8"?>
+<file path=ppt/slides/slide8.xml><?xml version="1.0" encoding="utf-8"?>
 <p:sld xmlns:a="http://schemas.openxmlformats.org/drawingml/2006/main" xmlns:r="http://schemas.openxmlformats.org/officeDocument/2006/relationships" xmlns:p="http://schemas.openxmlformats.org/presentationml/2006/main">
   <p:cSld>
     <p:spTree>
@@ -26433,12 +25141,12 @@
         <p:spPr>
           <a:xfrm>
             <a:off x="581193" y="2228003"/>
-            <a:ext cx="5449493" cy="3633047"/>
+            <a:ext cx="5028037" cy="3763364"/>
           </a:xfrm>
         </p:spPr>
         <p:txBody>
           <a:bodyPr anchor="ctr">
-            <a:normAutofit/>
+            <a:normAutofit lnSpcReduction="10000"/>
           </a:bodyPr>
           <a:lstStyle/>
           <a:p>
@@ -26592,10 +25300,531 @@
           </a:prstGeom>
         </p:spPr>
       </p:pic>
+      <p:sp>
+        <p:nvSpPr>
+          <p:cNvPr id="5" name="Arrow: Right 4">
+            <a:extLst>
+              <a:ext uri="{FF2B5EF4-FFF2-40B4-BE49-F238E27FC236}">
+                <a16:creationId xmlns:a16="http://schemas.microsoft.com/office/drawing/2014/main" id="{3913848C-CC49-4AE0-BB1D-B5CE8DD6B41C}"/>
+              </a:ext>
+            </a:extLst>
+          </p:cNvPr>
+          <p:cNvSpPr/>
+          <p:nvPr/>
+        </p:nvSpPr>
+        <p:spPr>
+          <a:xfrm rot="21106347">
+            <a:off x="4935839" y="3474123"/>
+            <a:ext cx="1346779" cy="259221"/>
+          </a:xfrm>
+          <a:prstGeom prst="rightArrow">
+            <a:avLst>
+              <a:gd name="adj1" fmla="val 36166"/>
+              <a:gd name="adj2" fmla="val 98420"/>
+            </a:avLst>
+          </a:prstGeom>
+          <a:solidFill>
+            <a:srgbClr val="73BF69"/>
+          </a:solidFill>
+        </p:spPr>
+        <p:style>
+          <a:lnRef idx="2">
+            <a:schemeClr val="accent1">
+              <a:shade val="15000"/>
+            </a:schemeClr>
+          </a:lnRef>
+          <a:fillRef idx="1">
+            <a:schemeClr val="accent1"/>
+          </a:fillRef>
+          <a:effectRef idx="0">
+            <a:schemeClr val="accent1"/>
+          </a:effectRef>
+          <a:fontRef idx="minor">
+            <a:schemeClr val="lt1"/>
+          </a:fontRef>
+        </p:style>
+        <p:txBody>
+          <a:bodyPr rtlCol="0" anchor="ctr"/>
+          <a:lstStyle/>
+          <a:p>
+            <a:pPr algn="ctr"/>
+            <a:endParaRPr lang="en-AE"/>
+          </a:p>
+        </p:txBody>
+      </p:sp>
+      <p:sp>
+        <p:nvSpPr>
+          <p:cNvPr id="6" name="Arrow: Right 5">
+            <a:extLst>
+              <a:ext uri="{FF2B5EF4-FFF2-40B4-BE49-F238E27FC236}">
+                <a16:creationId xmlns:a16="http://schemas.microsoft.com/office/drawing/2014/main" id="{EBFAA039-7EFA-17AE-6CC1-5FB2DA6FE6CD}"/>
+              </a:ext>
+            </a:extLst>
+          </p:cNvPr>
+          <p:cNvSpPr/>
+          <p:nvPr/>
+        </p:nvSpPr>
+        <p:spPr>
+          <a:xfrm rot="722338">
+            <a:off x="4590171" y="5696964"/>
+            <a:ext cx="793798" cy="266484"/>
+          </a:xfrm>
+          <a:prstGeom prst="rightArrow">
+            <a:avLst>
+              <a:gd name="adj1" fmla="val 36166"/>
+              <a:gd name="adj2" fmla="val 98420"/>
+            </a:avLst>
+          </a:prstGeom>
+          <a:solidFill>
+            <a:srgbClr val="73BF69"/>
+          </a:solidFill>
+        </p:spPr>
+        <p:style>
+          <a:lnRef idx="2">
+            <a:schemeClr val="accent1">
+              <a:shade val="15000"/>
+            </a:schemeClr>
+          </a:lnRef>
+          <a:fillRef idx="1">
+            <a:schemeClr val="accent1"/>
+          </a:fillRef>
+          <a:effectRef idx="0">
+            <a:schemeClr val="accent1"/>
+          </a:effectRef>
+          <a:fontRef idx="minor">
+            <a:schemeClr val="lt1"/>
+          </a:fontRef>
+        </p:style>
+        <p:txBody>
+          <a:bodyPr rtlCol="0" anchor="ctr"/>
+          <a:lstStyle/>
+          <a:p>
+            <a:pPr algn="ctr"/>
+            <a:endParaRPr lang="en-AE"/>
+          </a:p>
+        </p:txBody>
+      </p:sp>
     </p:spTree>
     <p:extLst>
       <p:ext uri="{BB962C8B-B14F-4D97-AF65-F5344CB8AC3E}">
         <p14:creationId xmlns:p14="http://schemas.microsoft.com/office/powerpoint/2010/main" val="556717254"/>
+      </p:ext>
+    </p:extLst>
+  </p:cSld>
+  <p:clrMapOvr>
+    <a:masterClrMapping/>
+  </p:clrMapOvr>
+</p:sld>
+</file>
+
+<file path=ppt/slides/slide9.xml><?xml version="1.0" encoding="utf-8"?>
+<p:sld xmlns:a="http://schemas.openxmlformats.org/drawingml/2006/main" xmlns:r="http://schemas.openxmlformats.org/officeDocument/2006/relationships" xmlns:p="http://schemas.openxmlformats.org/presentationml/2006/main">
+  <p:cSld>
+    <p:bg>
+      <p:bgPr>
+        <a:solidFill>
+          <a:schemeClr val="bg1"/>
+        </a:solidFill>
+        <a:effectLst/>
+      </p:bgPr>
+    </p:bg>
+    <p:spTree>
+      <p:nvGrpSpPr>
+        <p:cNvPr id="1" name=""/>
+        <p:cNvGrpSpPr/>
+        <p:nvPr/>
+      </p:nvGrpSpPr>
+      <p:grpSpPr>
+        <a:xfrm>
+          <a:off x="0" y="0"/>
+          <a:ext cx="0" cy="0"/>
+          <a:chOff x="0" y="0"/>
+          <a:chExt cx="0" cy="0"/>
+        </a:xfrm>
+      </p:grpSpPr>
+      <p:sp useBgFill="1">
+        <p:nvSpPr>
+          <p:cNvPr id="13" name="Rettangolo 12">
+            <a:extLst>
+              <a:ext uri="{FF2B5EF4-FFF2-40B4-BE49-F238E27FC236}">
+                <a16:creationId xmlns:a16="http://schemas.microsoft.com/office/drawing/2014/main" id="{4AE9D071-98CF-435C-BD2B-976514544DC5}"/>
+              </a:ext>
+              <a:ext uri="{C183D7F6-B498-43B3-948B-1728B52AA6E4}">
+                <adec:decorative xmlns:adec="http://schemas.microsoft.com/office/drawing/2017/decorative" val="1"/>
+              </a:ext>
+            </a:extLst>
+          </p:cNvPr>
+          <p:cNvSpPr>
+            <a:spLocks noChangeAspect="1"/>
+          </p:cNvSpPr>
+          <p:nvPr>
+            <p:extLst>
+              <p:ext uri="{386F3935-93C4-4BCD-93E2-E3B085C9AB24}">
+                <p16:designElem xmlns:p16="http://schemas.microsoft.com/office/powerpoint/2015/main" val="1"/>
+              </p:ext>
+            </p:extLst>
+          </p:nvPr>
+        </p:nvSpPr>
+        <p:spPr>
+          <a:xfrm>
+            <a:off x="0" y="0"/>
+            <a:ext cx="12192000" cy="6858000"/>
+          </a:xfrm>
+          <a:prstGeom prst="rect">
+            <a:avLst/>
+          </a:prstGeom>
+          <a:ln>
+            <a:noFill/>
+          </a:ln>
+        </p:spPr>
+        <p:style>
+          <a:lnRef idx="2">
+            <a:schemeClr val="accent1">
+              <a:shade val="50000"/>
+            </a:schemeClr>
+          </a:lnRef>
+          <a:fillRef idx="1">
+            <a:schemeClr val="accent1"/>
+          </a:fillRef>
+          <a:effectRef idx="0">
+            <a:schemeClr val="accent1"/>
+          </a:effectRef>
+          <a:fontRef idx="minor">
+            <a:schemeClr val="lt1"/>
+          </a:fontRef>
+        </p:style>
+        <p:txBody>
+          <a:bodyPr rtlCol="0" anchor="ctr"/>
+          <a:lstStyle/>
+          <a:p>
+            <a:pPr algn="ctr" rtl="0"/>
+            <a:endParaRPr lang="en-US" noProof="0" dirty="0"/>
+          </a:p>
+        </p:txBody>
+      </p:sp>
+      <p:pic>
+        <p:nvPicPr>
+          <p:cNvPr id="8" name="Segnaposto contenuto 4" descr="Numeri digitali">
+            <a:extLst>
+              <a:ext uri="{FF2B5EF4-FFF2-40B4-BE49-F238E27FC236}">
+                <a16:creationId xmlns:a16="http://schemas.microsoft.com/office/drawing/2014/main" id="{EA70616B-E344-4856-8DF9-707C26236613}"/>
+              </a:ext>
+            </a:extLst>
+          </p:cNvPr>
+          <p:cNvPicPr>
+            <a:picLocks noChangeAspect="1"/>
+          </p:cNvPicPr>
+          <p:nvPr/>
+        </p:nvPicPr>
+        <p:blipFill rotWithShape="1">
+          <a:blip r:embed="rId3" cstate="screen">
+            <a:extLst>
+              <a:ext uri="{28A0092B-C50C-407E-A947-70E740481C1C}">
+                <a14:useLocalDpi xmlns:a14="http://schemas.microsoft.com/office/drawing/2010/main"/>
+              </a:ext>
+            </a:extLst>
+          </a:blip>
+          <a:srcRect t="10681" r="9091" b="12711"/>
+          <a:stretch/>
+        </p:blipFill>
+        <p:spPr>
+          <a:xfrm>
+            <a:off x="20" y="10"/>
+            <a:ext cx="12191980" cy="6857990"/>
+          </a:xfrm>
+          <a:prstGeom prst="rect">
+            <a:avLst/>
+          </a:prstGeom>
+        </p:spPr>
+      </p:pic>
+      <p:grpSp>
+        <p:nvGrpSpPr>
+          <p:cNvPr id="15" name="Gruppo 14">
+            <a:extLst>
+              <a:ext uri="{FF2B5EF4-FFF2-40B4-BE49-F238E27FC236}">
+                <a16:creationId xmlns:a16="http://schemas.microsoft.com/office/drawing/2014/main" id="{D619FC33-16ED-4246-9596-BEFEB55E4CF6}"/>
+              </a:ext>
+              <a:ext uri="{C183D7F6-B498-43B3-948B-1728B52AA6E4}">
+                <adec:decorative xmlns:adec="http://schemas.microsoft.com/office/drawing/2017/decorative" val="1"/>
+              </a:ext>
+            </a:extLst>
+          </p:cNvPr>
+          <p:cNvGrpSpPr>
+            <a:grpSpLocks noChangeAspect="1"/>
+          </p:cNvGrpSpPr>
+          <p:nvPr>
+            <p:extLst>
+              <p:ext uri="{386F3935-93C4-4BCD-93E2-E3B085C9AB24}">
+                <p16:designElem xmlns:p16="http://schemas.microsoft.com/office/powerpoint/2015/main" val="1"/>
+              </p:ext>
+            </p:extLst>
+          </p:nvPr>
+        </p:nvGrpSpPr>
+        <p:grpSpPr>
+          <a:xfrm>
+            <a:off x="438067" y="457200"/>
+            <a:ext cx="7507083" cy="5935132"/>
+            <a:chOff x="438067" y="457200"/>
+            <a:chExt cx="7507083" cy="5935132"/>
+          </a:xfrm>
+        </p:grpSpPr>
+        <p:sp>
+          <p:nvSpPr>
+            <p:cNvPr id="16" name="Rettangolo 15">
+              <a:extLst>
+                <a:ext uri="{FF2B5EF4-FFF2-40B4-BE49-F238E27FC236}">
+                  <a16:creationId xmlns:a16="http://schemas.microsoft.com/office/drawing/2014/main" id="{2EEA80E1-F99F-4009-837F-2F72F8A5D580}"/>
+                </a:ext>
+                <a:ext uri="{C183D7F6-B498-43B3-948B-1728B52AA6E4}">
+                  <adec:decorative xmlns:adec="http://schemas.microsoft.com/office/drawing/2017/decorative" val="1"/>
+                </a:ext>
+              </a:extLst>
+            </p:cNvPr>
+            <p:cNvSpPr>
+              <a:spLocks/>
+            </p:cNvSpPr>
+            <p:nvPr>
+              <p:extLst>
+                <p:ext uri="{386F3935-93C4-4BCD-93E2-E3B085C9AB24}">
+                  <p16:designElem xmlns:p16="http://schemas.microsoft.com/office/powerpoint/2015/main" val="1"/>
+                </p:ext>
+              </p:extLst>
+            </p:nvPr>
+          </p:nvSpPr>
+          <p:spPr>
+            <a:xfrm>
+              <a:off x="438067" y="618067"/>
+              <a:ext cx="7503665" cy="5774265"/>
+            </a:xfrm>
+            <a:prstGeom prst="rect">
+              <a:avLst/>
+            </a:prstGeom>
+            <a:solidFill>
+              <a:schemeClr val="accent1">
+                <a:alpha val="97000"/>
+              </a:schemeClr>
+            </a:solidFill>
+            <a:ln w="6350" cmpd="sng">
+              <a:noFill/>
+            </a:ln>
+            <a:effectLst/>
+          </p:spPr>
+          <p:style>
+            <a:lnRef idx="1">
+              <a:schemeClr val="accent1"/>
+            </a:lnRef>
+            <a:fillRef idx="3">
+              <a:schemeClr val="accent1"/>
+            </a:fillRef>
+            <a:effectRef idx="2">
+              <a:schemeClr val="accent1"/>
+            </a:effectRef>
+            <a:fontRef idx="minor">
+              <a:schemeClr val="lt1"/>
+            </a:fontRef>
+          </p:style>
+          <p:txBody>
+            <a:bodyPr/>
+            <a:lstStyle/>
+            <a:p>
+              <a:endParaRPr lang="en-US" noProof="0" dirty="0"/>
+            </a:p>
+          </p:txBody>
+        </p:sp>
+        <p:sp>
+          <p:nvSpPr>
+            <p:cNvPr id="17" name="Rettangolo 16">
+              <a:extLst>
+                <a:ext uri="{FF2B5EF4-FFF2-40B4-BE49-F238E27FC236}">
+                  <a16:creationId xmlns:a16="http://schemas.microsoft.com/office/drawing/2014/main" id="{0230AF9A-4641-4BD8-9F95-9607CD304039}"/>
+                </a:ext>
+                <a:ext uri="{C183D7F6-B498-43B3-948B-1728B52AA6E4}">
+                  <adec:decorative xmlns:adec="http://schemas.microsoft.com/office/drawing/2017/decorative" val="1"/>
+                </a:ext>
+              </a:extLst>
+            </p:cNvPr>
+            <p:cNvSpPr>
+              <a:spLocks/>
+            </p:cNvSpPr>
+            <p:nvPr>
+              <p:extLst>
+                <p:ext uri="{386F3935-93C4-4BCD-93E2-E3B085C9AB24}">
+                  <p16:designElem xmlns:p16="http://schemas.microsoft.com/office/powerpoint/2015/main" val="1"/>
+                </p:ext>
+              </p:extLst>
+            </p:nvPr>
+          </p:nvSpPr>
+          <p:spPr>
+            <a:xfrm>
+              <a:off x="438068" y="457200"/>
+              <a:ext cx="3703320" cy="94997"/>
+            </a:xfrm>
+            <a:prstGeom prst="rect">
+              <a:avLst/>
+            </a:prstGeom>
+            <a:solidFill>
+              <a:schemeClr val="accent1"/>
+            </a:solidFill>
+            <a:ln>
+              <a:noFill/>
+            </a:ln>
+            <a:effectLst/>
+          </p:spPr>
+          <p:style>
+            <a:lnRef idx="1">
+              <a:schemeClr val="accent1"/>
+            </a:lnRef>
+            <a:fillRef idx="3">
+              <a:schemeClr val="accent1"/>
+            </a:fillRef>
+            <a:effectRef idx="2">
+              <a:schemeClr val="accent1"/>
+            </a:effectRef>
+            <a:fontRef idx="minor">
+              <a:schemeClr val="lt1"/>
+            </a:fontRef>
+          </p:style>
+          <p:txBody>
+            <a:bodyPr/>
+            <a:lstStyle/>
+            <a:p>
+              <a:endParaRPr lang="en-US" noProof="0" dirty="0"/>
+            </a:p>
+          </p:txBody>
+        </p:sp>
+        <p:sp>
+          <p:nvSpPr>
+            <p:cNvPr id="18" name="Rettangolo 17">
+              <a:extLst>
+                <a:ext uri="{FF2B5EF4-FFF2-40B4-BE49-F238E27FC236}">
+                  <a16:creationId xmlns:a16="http://schemas.microsoft.com/office/drawing/2014/main" id="{8703D4EC-9389-41B6-B88B-B6FDC8CD3330}"/>
+                </a:ext>
+                <a:ext uri="{C183D7F6-B498-43B3-948B-1728B52AA6E4}">
+                  <adec:decorative xmlns:adec="http://schemas.microsoft.com/office/drawing/2017/decorative" val="1"/>
+                </a:ext>
+              </a:extLst>
+            </p:cNvPr>
+            <p:cNvSpPr>
+              <a:spLocks/>
+            </p:cNvSpPr>
+            <p:nvPr>
+              <p:extLst>
+                <p:ext uri="{386F3935-93C4-4BCD-93E2-E3B085C9AB24}">
+                  <p16:designElem xmlns:p16="http://schemas.microsoft.com/office/powerpoint/2015/main" val="1"/>
+                </p:ext>
+              </p:extLst>
+            </p:nvPr>
+          </p:nvSpPr>
+          <p:spPr>
+            <a:xfrm>
+              <a:off x="4241830" y="457200"/>
+              <a:ext cx="3703320" cy="91440"/>
+            </a:xfrm>
+            <a:prstGeom prst="rect">
+              <a:avLst/>
+            </a:prstGeom>
+            <a:solidFill>
+              <a:schemeClr val="accent2"/>
+            </a:solidFill>
+            <a:ln>
+              <a:noFill/>
+            </a:ln>
+            <a:effectLst/>
+          </p:spPr>
+          <p:style>
+            <a:lnRef idx="1">
+              <a:schemeClr val="accent1"/>
+            </a:lnRef>
+            <a:fillRef idx="3">
+              <a:schemeClr val="accent1"/>
+            </a:fillRef>
+            <a:effectRef idx="2">
+              <a:schemeClr val="accent1"/>
+            </a:effectRef>
+            <a:fontRef idx="minor">
+              <a:schemeClr val="lt1"/>
+            </a:fontRef>
+          </p:style>
+          <p:txBody>
+            <a:bodyPr/>
+            <a:lstStyle/>
+            <a:p>
+              <a:endParaRPr lang="en-US" noProof="0" dirty="0"/>
+            </a:p>
+          </p:txBody>
+        </p:sp>
+      </p:grpSp>
+      <p:sp>
+        <p:nvSpPr>
+          <p:cNvPr id="2" name="Titolo 1">
+            <a:extLst>
+              <a:ext uri="{FF2B5EF4-FFF2-40B4-BE49-F238E27FC236}">
+                <a16:creationId xmlns:a16="http://schemas.microsoft.com/office/drawing/2014/main" id="{7F2616EE-270D-4F4C-BA1F-2708D387B800}"/>
+              </a:ext>
+            </a:extLst>
+          </p:cNvPr>
+          <p:cNvSpPr>
+            <a:spLocks noGrp="1"/>
+          </p:cNvSpPr>
+          <p:nvPr>
+            <p:ph type="title"/>
+          </p:nvPr>
+        </p:nvSpPr>
+        <p:spPr>
+          <a:xfrm>
+            <a:off x="584200" y="1006956"/>
+            <a:ext cx="7213600" cy="1121871"/>
+          </a:xfrm>
+        </p:spPr>
+        <p:txBody>
+          <a:bodyPr rtlCol="0" anchor="ctr">
+            <a:normAutofit/>
+          </a:bodyPr>
+          <a:lstStyle/>
+          <a:p>
+            <a:r>
+              <a:rPr lang="en-US" sz="3200" dirty="0"/>
+              <a:t> Achievements</a:t>
+            </a:r>
+            <a:endParaRPr lang="en-US" sz="3200" noProof="0" dirty="0"/>
+          </a:p>
+        </p:txBody>
+      </p:sp>
+      <p:graphicFrame>
+        <p:nvGraphicFramePr>
+          <p:cNvPr id="6" name="Segnaposto contenuto 5" descr="SmartArt">
+            <a:extLst>
+              <a:ext uri="{FF2B5EF4-FFF2-40B4-BE49-F238E27FC236}">
+                <a16:creationId xmlns:a16="http://schemas.microsoft.com/office/drawing/2014/main" id="{BF629521-FFD2-45DA-9D1D-A5F09BD5A2D9}"/>
+              </a:ext>
+            </a:extLst>
+          </p:cNvPr>
+          <p:cNvGraphicFramePr>
+            <a:graphicFrameLocks noGrp="1"/>
+          </p:cNvGraphicFramePr>
+          <p:nvPr>
+            <p:ph idx="1"/>
+            <p:extLst>
+              <p:ext uri="{D42A27DB-BD31-4B8C-83A1-F6EECF244321}">
+                <p14:modId xmlns:p14="http://schemas.microsoft.com/office/powerpoint/2010/main" val="2973809506"/>
+              </p:ext>
+            </p:extLst>
+          </p:nvPr>
+        </p:nvGraphicFramePr>
+        <p:xfrm>
+          <a:off x="719571" y="2198254"/>
+          <a:ext cx="6958486" cy="3563938"/>
+        </p:xfrm>
+        <a:graphic>
+          <a:graphicData uri="http://schemas.openxmlformats.org/drawingml/2006/diagram">
+            <dgm:relIds xmlns:dgm="http://schemas.openxmlformats.org/drawingml/2006/diagram" xmlns:r="http://schemas.openxmlformats.org/officeDocument/2006/relationships" r:dm="rId4" r:lo="rId5" r:qs="rId6" r:cs="rId7"/>
+          </a:graphicData>
+        </a:graphic>
+      </p:graphicFrame>
+    </p:spTree>
+    <p:extLst>
+      <p:ext uri="{BB962C8B-B14F-4D97-AF65-F5344CB8AC3E}">
+        <p14:creationId xmlns:p14="http://schemas.microsoft.com/office/powerpoint/2010/main" val="4209322005"/>
       </p:ext>
     </p:extLst>
   </p:cSld>
